--- a/materiales/actividad-1/tema-04-modelo-datos-v4.pptx
+++ b/materiales/actividad-1/tema-04-modelo-datos-v4.pptx
@@ -11711,28 +11711,7 @@
             <a:spAutoFit/>
           </a:bodyPr>
           <a:lstStyle/>
-          <a:p>
-            <a:pPr algn="ctr">
-              <a:lnSpc>
-                <a:spcPct val="100000"/>
-              </a:lnSpc>
-              <a:spcBef>
-                <a:spcPts val="0"/>
-              </a:spcBef>
-              <a:spcAft>
-                <a:spcPts val="0"/>
-              </a:spcAft>
-            </a:pPr>
-            <a:r>
-              <a:rPr sz="1150" b="1" i="0">
-                <a:solidFill>
-                  <a:srgbClr val="1D4696"/>
-                </a:solidFill>
-                <a:latin typeface="Calibri"/>
-              </a:rPr>
-              <a:t>FOTOGRAFÍA DEL GRUPO</a:t>
-            </a:r>
-          </a:p>
+          <a:p/>
         </p:txBody>
       </p:sp>
       <p:sp>
@@ -12217,6 +12196,30 @@
           </a:p>
         </p:txBody>
       </p:sp>
+      <p:pic>
+        <p:nvPicPr>
+          <p:cNvPr id="21" name="Picture 20" descr="foto-grupal.jpeg"/>
+          <p:cNvPicPr>
+            <a:picLocks noChangeAspect="1"/>
+          </p:cNvPicPr>
+          <p:nvPr/>
+        </p:nvPicPr>
+        <p:blipFill>
+          <a:blip r:embed="rId2"/>
+          <a:stretch>
+            <a:fillRect/>
+          </a:stretch>
+        </p:blipFill>
+        <p:spPr>
+          <a:xfrm>
+            <a:off x="5239512" y="2148840"/>
+            <a:ext cx="1810512" cy="1357884"/>
+          </a:xfrm>
+          <a:prstGeom prst="rect">
+            <a:avLst/>
+          </a:prstGeom>
+        </p:spPr>
+      </p:pic>
     </p:spTree>
   </p:cSld>
   <p:clrMapOvr>
@@ -13295,7 +13298,7 @@
                 </a:solidFill>
                 <a:latin typeface="Calibri"/>
               </a:rPr>
-              <a:t>USUARIO</a:t>
+              <a:t>AUTOR</a:t>
             </a:r>
           </a:p>
         </p:txBody>
@@ -13441,7 +13444,7 @@
                 </a:solidFill>
                 <a:latin typeface="Calibri"/>
               </a:rPr>
-              <a:t>PRÉSTAMO</a:t>
+              <a:t>EDITORIAL</a:t>
             </a:r>
           </a:p>
         </p:txBody>
@@ -13655,7 +13658,9 @@
                 </a:solidFill>
                 <a:latin typeface="Calibri"/>
               </a:rPr>
-              <a:t>idEjemplar: entero</a:t>
+              <a:t>idEjemplar: entero
+ubicación · disponibilidad: Estado
+cambiarEstado()</a:t>
             </a:r>
           </a:p>
           <a:p>
@@ -13677,7 +13682,7 @@
                 </a:solidFill>
                 <a:latin typeface="Calibri"/>
               </a:rPr>
-              <a:t>estado: Estado</a:t>
+              <a:t/>
             </a:r>
           </a:p>
           <a:p>
@@ -13699,7 +13704,7 @@
                 </a:solidFill>
                 <a:latin typeface="Calibri"/>
               </a:rPr>
-              <a:t>cambiarEstado()</a:t>
+              <a:t/>
             </a:r>
           </a:p>
         </p:txBody>
@@ -14126,7 +14131,7 @@
                 </a:solidFill>
                 <a:latin typeface="Calibri"/>
               </a:rPr>
-              <a:t>RECONSTRUCCIÓN ANALÍTICA DE OPERACIONES BIBLIOTECARIAS; ESQUEMA ORIGINAL NO PUBLICADO EN EL RESUMEN</a:t>
+              <a:t>MODELO CONCEPTUAL DEL CATÁLOGO PÚBLICO; ESQUEMA INTERNO NO OBSERVABLE</a:t>
             </a:r>
           </a:p>
         </p:txBody>
@@ -14204,7 +14209,7 @@
                 </a:solidFill>
                 <a:latin typeface="Calibri"/>
               </a:rPr>
-              <a:t>USUARIO</a:t>
+              <a:t>AUTOR</a:t>
             </a:r>
           </a:p>
         </p:txBody>
@@ -14250,7 +14255,8 @@
                 </a:solidFill>
                 <a:latin typeface="Calibri"/>
               </a:rPr>
-              <a:t>PK id_usuario</a:t>
+              <a:t>PK id_autor
+nombre</a:t>
             </a:r>
           </a:p>
           <a:p>
@@ -14272,7 +14278,7 @@
                 </a:solidFill>
                 <a:latin typeface="Calibri"/>
               </a:rPr>
-              <a:t>nombre</a:t>
+              <a:t/>
             </a:r>
           </a:p>
         </p:txBody>
@@ -14350,7 +14356,7 @@
                 </a:solidFill>
                 <a:latin typeface="Calibri"/>
               </a:rPr>
-              <a:t>PRÉSTAMO</a:t>
+              <a:t>EDITORIAL</a:t>
             </a:r>
           </a:p>
         </p:txBody>
@@ -14396,7 +14402,8 @@
                 </a:solidFill>
                 <a:latin typeface="Calibri"/>
               </a:rPr>
-              <a:t>PK id_prestamo</a:t>
+              <a:t>PK id_editorial
+nombre</a:t>
             </a:r>
           </a:p>
           <a:p>
@@ -14418,7 +14425,7 @@
                 </a:solidFill>
                 <a:latin typeface="Calibri"/>
               </a:rPr>
-              <a:t>FK id_usuario</a:t>
+              <a:t/>
             </a:r>
           </a:p>
           <a:p>
@@ -14440,7 +14447,7 @@
                 </a:solidFill>
                 <a:latin typeface="Calibri"/>
               </a:rPr>
-              <a:t>FK id_ejemplar</a:t>
+              <a:t/>
             </a:r>
           </a:p>
         </p:txBody>
@@ -14564,7 +14571,9 @@
                 </a:solidFill>
                 <a:latin typeface="Calibri"/>
               </a:rPr>
-              <a:t>PK id_ejemplar</a:t>
+              <a:t>PK id_ejemplar
+FK id_obra
+ubicación · disponibilidad</a:t>
             </a:r>
           </a:p>
           <a:p>
@@ -14586,7 +14595,7 @@
                 </a:solidFill>
                 <a:latin typeface="Calibri"/>
               </a:rPr>
-              <a:t>FK id_titulo</a:t>
+              <a:t/>
             </a:r>
           </a:p>
           <a:p>
@@ -14608,7 +14617,7 @@
                 </a:solidFill>
                 <a:latin typeface="Calibri"/>
               </a:rPr>
-              <a:t>estado</a:t>
+              <a:t/>
             </a:r>
           </a:p>
         </p:txBody>
@@ -14686,7 +14695,7 @@
                 </a:solidFill>
                 <a:latin typeface="Calibri"/>
               </a:rPr>
-              <a:t>TÍTULO</a:t>
+              <a:t>OBRA</a:t>
             </a:r>
           </a:p>
         </p:txBody>
@@ -14732,7 +14741,8 @@
                 </a:solidFill>
                 <a:latin typeface="Calibri"/>
               </a:rPr>
-              <a:t>PK id_titulo</a:t>
+              <a:t>PK id_obra
+isbn · título</a:t>
             </a:r>
           </a:p>
           <a:p>
@@ -14754,7 +14764,7 @@
                 </a:solidFill>
                 <a:latin typeface="Calibri"/>
               </a:rPr>
-              <a:t>isbn · título</a:t>
+              <a:t/>
             </a:r>
           </a:p>
         </p:txBody>
@@ -15082,7 +15092,8 @@
                 </a:solidFill>
                 <a:latin typeface="Calibri"/>
               </a:rPr>
-              <a:t>PK id_reserva</a:t>
+              <a:t>PK id_reserva
+FK id_ejemplar · fecha · estado</a:t>
             </a:r>
           </a:p>
           <a:p>
@@ -15104,7 +15115,7 @@
                 </a:solidFill>
                 <a:latin typeface="Calibri"/>
               </a:rPr>
-              <a:t>FK id_usuario · FK id_ejemplar</a:t>
+              <a:t/>
             </a:r>
           </a:p>
         </p:txBody>
@@ -15368,7 +15379,7 @@
                 </a:solidFill>
                 <a:latin typeface="Calibri"/>
               </a:rPr>
-              <a:t>Las claves foráneas enlazan la operación con la persona y la copia; TÍTULO separa los datos bibliográficos de cada ejemplar físico.</a:t>
+              <a:t>Las relaciones vinculan la obra con autor, editorial y ejemplares; la reserva se asocia a una copia. El modelo no describe la base interna de UPDS.</a:t>
             </a:r>
           </a:p>
         </p:txBody>
@@ -15414,7 +15425,7 @@
                 </a:solidFill>
                 <a:latin typeface="Calibri"/>
               </a:rPr>
-              <a:t>Fuente: </a:t>
+              <a:t>Fuente: Modelo conceptual derivado de los datos visibles en el catálogo UPDS · Elmasri y Navathe · diagrama propuesto</a:t>
             </a:r>
             <a:r>
               <a:rPr sz="760" b="0" i="0">
@@ -15423,7 +15434,7 @@
                 </a:solidFill>
                 <a:latin typeface="Calibri"/>
               </a:rPr>
-              <a:t>Modelo lógico derivado de los servicios UPEA · Elmasri y Navathe · Oracle Data Modeler  ·  as of 6 de octubre de 2026</a:t>
+              <a:t/>
             </a:r>
           </a:p>
         </p:txBody>
@@ -15691,7 +15702,7 @@
                 </a:solidFill>
                 <a:latin typeface="Calibri"/>
               </a:rPr>
-              <a:t>USUARIO 1 → N PRÉSTAMO</a:t>
+              <a:t>AUTOR 1 → N EDITORIAL</a:t>
             </a:r>
           </a:p>
         </p:txBody>
@@ -15737,7 +15748,7 @@
                 </a:solidFill>
                 <a:latin typeface="Calibri"/>
               </a:rPr>
-              <a:t>id_usuario aparece como FK en PRÉSTAMO</a:t>
+              <a:t>id_usuario aparece como FK en EDITORIAL</a:t>
             </a:r>
           </a:p>
         </p:txBody>
@@ -15815,7 +15826,7 @@
                 </a:solidFill>
                 <a:latin typeface="Calibri"/>
               </a:rPr>
-              <a:t>EJEMPLAR 1 → N PRÉSTAMO</a:t>
+              <a:t>EJEMPLAR 1 → N EDITORIAL</a:t>
             </a:r>
           </a:p>
         </p:txBody>
@@ -15861,7 +15872,7 @@
                 </a:solidFill>
                 <a:latin typeface="Calibri"/>
               </a:rPr>
-              <a:t>id_ejemplar mantiene el historial de operaciones</a:t>
+              <a:t>Cada copia pertenece a una obra</a:t>
             </a:r>
           </a:p>
         </p:txBody>
@@ -15939,7 +15950,7 @@
                 </a:solidFill>
                 <a:latin typeface="Calibri"/>
               </a:rPr>
-              <a:t>TÍTULO 1 → N EJEMPLAR</a:t>
+              <a:t>OBRA 1 → N EJEMPLAR</a:t>
             </a:r>
           </a:p>
         </p:txBody>
@@ -15985,7 +15996,7 @@
                 </a:solidFill>
                 <a:latin typeface="Calibri"/>
               </a:rPr>
-              <a:t>una obra puede tener varias copias físicas</a:t>
+              <a:t>Una editorial puede publicar varias obras</a:t>
             </a:r>
           </a:p>
         </p:txBody>
@@ -16063,7 +16074,7 @@
                 </a:solidFill>
                 <a:latin typeface="Calibri"/>
               </a:rPr>
-              <a:t>USUARIO + EJEMPLAR → RESERVA</a:t>
+              <a:t>AUTOR + EJEMPLAR → RESERVA</a:t>
             </a:r>
           </a:p>
         </p:txBody>
@@ -16109,7 +16120,7 @@
                 </a:solidFill>
                 <a:latin typeface="Calibri"/>
               </a:rPr>
-              <a:t>la reserva conserva quién solicita qué copia</a:t>
+              <a:t>La ficha puede ofrecer una opción de reserva</a:t>
             </a:r>
           </a:p>
         </p:txBody>
@@ -16560,7 +16571,9 @@
                 </a:solidFill>
                 <a:latin typeface="Calibri"/>
               </a:rPr>
-              <a:t>Ejemplar E-104 · ISBN · título · autor</a:t>
+              <a:t>Ejemplar E-104 · obra · autor
+Ejemplar E-105 · obra · autor
+Ejemplar E-106 · obra · autor</a:t>
             </a:r>
           </a:p>
           <a:p>
@@ -16582,7 +16595,7 @@
                 </a:solidFill>
                 <a:latin typeface="Calibri"/>
               </a:rPr>
-              <a:t>Ejemplar E-105 · ISBN · título · autor</a:t>
+              <a:t/>
             </a:r>
           </a:p>
           <a:p>
@@ -16604,7 +16617,7 @@
                 </a:solidFill>
                 <a:latin typeface="Calibri"/>
               </a:rPr>
-              <a:t>Ejemplar E-106 · ISBN · título · autor</a:t>
+              <a:t/>
             </a:r>
           </a:p>
         </p:txBody>
@@ -16730,7 +16743,9 @@
                 </a:solidFill>
                 <a:latin typeface="Calibri"/>
               </a:rPr>
-              <a:t>TÍTULO: ISBN · nombre · autor</a:t>
+              <a:t>OBRA: ISBN · nombre · autor
+EJEMPLAR: código · ubicación · disponibilidad · id_titulo
+Cada copia referencia un único título.</a:t>
             </a:r>
           </a:p>
           <a:p>
@@ -16752,7 +16767,7 @@
                 </a:solidFill>
                 <a:latin typeface="Calibri"/>
               </a:rPr>
-              <a:t>EJEMPLAR: código · estado · id_titulo</a:t>
+              <a:t/>
             </a:r>
           </a:p>
           <a:p>
@@ -16774,7 +16789,7 @@
                 </a:solidFill>
                 <a:latin typeface="Calibri"/>
               </a:rPr>
-              <a:t>Cada copia referencia un único título.</a:t>
+              <a:t/>
             </a:r>
           </a:p>
         </p:txBody>
@@ -17030,7 +17045,7 @@
                 </a:solidFill>
                 <a:latin typeface="Calibri Light"/>
               </a:rPr>
-              <a:t>El caso UPEA confirma PostgreSQL y las funciones bibliotecarias</a:t>
+              <a:t>Los registros públicos del catálogo UPDS permiten proponer un modelo de datos</a:t>
             </a:r>
           </a:p>
         </p:txBody>
@@ -17076,7 +17091,7 @@
                 </a:solidFill>
                 <a:latin typeface="Calibri"/>
               </a:rPr>
-              <a:t>06 · CASO UPEA</a:t>
+              <a:t>06 · CASO REAL · UPDS</a:t>
             </a:r>
           </a:p>
         </p:txBody>
@@ -17202,7 +17217,8 @@
                 </a:solidFill>
                 <a:latin typeface="Calibri"/>
               </a:rPr>
-              <a:t>PRÉSTAMOS</a:t>
+              <a:t>OBRAS
+fichas públicas</a:t>
             </a:r>
           </a:p>
           <a:p>
@@ -17224,7 +17240,7 @@
                 </a:solidFill>
                 <a:latin typeface="Calibri"/>
               </a:rPr>
-              <a:t>función descrita</a:t>
+              <a:t/>
             </a:r>
           </a:p>
         </p:txBody>
@@ -17304,7 +17320,8 @@
                 </a:solidFill>
                 <a:latin typeface="Calibri"/>
               </a:rPr>
-              <a:t>RESERVAS</a:t>
+              <a:t>EJEMPLARES
+datos consultables</a:t>
             </a:r>
           </a:p>
           <a:p>
@@ -17326,7 +17343,7 @@
                 </a:solidFill>
                 <a:latin typeface="Calibri"/>
               </a:rPr>
-              <a:t>a distancia</a:t>
+              <a:t/>
             </a:r>
           </a:p>
         </p:txBody>
@@ -17406,7 +17423,8 @@
                 </a:solidFill>
                 <a:latin typeface="Calibri"/>
               </a:rPr>
-              <a:t>REPORTES</a:t>
+              <a:t>DISPONIBILIDAD
+visible en fichas</a:t>
             </a:r>
           </a:p>
           <a:p>
@@ -17428,7 +17446,7 @@
                 </a:solidFill>
                 <a:latin typeface="Calibri"/>
               </a:rPr>
-              <a:t>función descrita</a:t>
+              <a:t/>
             </a:r>
           </a:p>
         </p:txBody>
@@ -17508,7 +17526,8 @@
                 </a:solidFill>
                 <a:latin typeface="Calibri"/>
               </a:rPr>
-              <a:t>ESTADÍSTICAS</a:t>
+              <a:t>RESERVA
+opción en registro</a:t>
             </a:r>
           </a:p>
           <a:p>
@@ -17530,7 +17549,7 @@
                 </a:solidFill>
                 <a:latin typeface="Calibri"/>
               </a:rPr>
-              <a:t>función descrita</a:t>
+              <a:t/>
             </a:r>
           </a:p>
         </p:txBody>
@@ -17610,7 +17629,7 @@
                 </a:solidFill>
                 <a:latin typeface="Calibri"/>
               </a:rPr>
-              <a:t>DOCUMENTADO</a:t>
+              <a:t>OBSERVABLE</a:t>
             </a:r>
           </a:p>
         </p:txBody>
@@ -17656,7 +17675,7 @@
                 </a:solidFill>
                 <a:latin typeface="Calibri"/>
               </a:rPr>
-              <a:t>UWE/UML · PHP · PostgreSQL</a:t>
+              <a:t>Fichas · ejemplares · disponibilidad</a:t>
             </a:r>
           </a:p>
         </p:txBody>
@@ -17782,7 +17801,7 @@
                 </a:solidFill>
                 <a:latin typeface="Calibri"/>
               </a:rPr>
-              <a:t>Usuario · préstamo · ejemplar · título · reserva</a:t>
+              <a:t>Obra · autor · editorial · ejemplar · reserva</a:t>
             </a:r>
           </a:p>
         </p:txBody>
@@ -17828,7 +17847,7 @@
                 </a:solidFill>
                 <a:latin typeface="Calibri"/>
               </a:rPr>
-              <a:t>El resumen confirma herramientas y operaciones.</a:t>
+              <a:t>El catálogo muestra datos bibliográficos y ejemplares.</a:t>
             </a:r>
           </a:p>
         </p:txBody>
@@ -17874,7 +17893,7 @@
                 </a:solidFill>
                 <a:latin typeface="Calibri"/>
               </a:rPr>
-              <a:t>La estructura lógica reconstruye esos conceptos.</a:t>
+              <a:t>El diagrama propone entidades y relaciones para representarlos.</a:t>
             </a:r>
           </a:p>
         </p:txBody>
@@ -17922,7 +17941,7 @@
                 </a:solidFill>
                 <a:latin typeface="Calibri"/>
               </a:rPr>
-              <a:t>Abrir registro institucional UPEA ↗</a:t>
+              <a:t>Abrir catálogo público UPDS ↗</a:t>
             </a:r>
           </a:p>
         </p:txBody>
@@ -17968,7 +17987,7 @@
                 </a:solidFill>
                 <a:latin typeface="Calibri"/>
               </a:rPr>
-              <a:t>Fuente: </a:t>
+              <a:t>Fuente: Catálogo público de Biblioteca UPDS · estructura conceptual propuesta</a:t>
             </a:r>
             <a:r>
               <a:rPr sz="760" b="0" i="0">
@@ -17977,7 +17996,7 @@
                 </a:solidFill>
                 <a:latin typeface="Calibri"/>
               </a:rPr>
-              <a:t>Tintaya Villavicencio, R. (2013). Repositorio Institucional UPEA, PG-0015  ·  as of 6 de octubre de 2026</a:t>
+              <a:t/>
             </a:r>
           </a:p>
         </p:txBody>

--- a/materiales/actividad-1/tema-04-modelo-datos-v4.pptx
+++ b/materiales/actividad-1/tema-04-modelo-datos-v4.pptx
@@ -11801,7 +11801,7 @@
                 </a:solidFill>
                 <a:latin typeface="Calibri"/>
               </a:rPr>
-              <a:t>INTEGRANTE 1</a:t>
+              <a:t>Ashley Aguilar Perez</a:t>
             </a:r>
           </a:p>
         </p:txBody>
@@ -11879,7 +11879,7 @@
                 </a:solidFill>
                 <a:latin typeface="Calibri"/>
               </a:rPr>
-              <a:t>INTEGRANTE 2</a:t>
+              <a:t>Nicolas Soria Yabeta</a:t>
             </a:r>
           </a:p>
         </p:txBody>
@@ -11957,7 +11957,7 @@
                 </a:solidFill>
                 <a:latin typeface="Calibri"/>
               </a:rPr>
-              <a:t>INTEGRANTE 3</a:t>
+              <a:t>Erick Bravo Borges</a:t>
             </a:r>
           </a:p>
         </p:txBody>
@@ -12035,7 +12035,7 @@
                 </a:solidFill>
                 <a:latin typeface="Calibri"/>
               </a:rPr>
-              <a:t>INTEGRANTE 4</a:t>
+              <a:t>Jose Manuel Callecusi Guarachi</a:t>
             </a:r>
           </a:p>
         </p:txBody>
@@ -12113,7 +12113,7 @@
                 </a:solidFill>
                 <a:latin typeface="Calibri"/>
               </a:rPr>
-              <a:t>INTEGRANTE 5</a:t>
+              <a:t>Ruben Churqui Limachi</a:t>
             </a:r>
           </a:p>
         </p:txBody>

--- a/materiales/actividad-1/tema-04-modelo-datos-v4.pptx
+++ b/materiales/actividad-1/tema-04-modelo-datos-v4.pptx
@@ -11808,38 +11808,6 @@
       </p:sp>
       <p:sp>
         <p:nvSpPr>
-          <p:cNvPr id="11" name="Rectangle 10"/>
-          <p:cNvSpPr/>
-          <p:nvPr/>
-        </p:nvSpPr>
-        <p:spPr>
-          <a:xfrm>
-            <a:off x="3703320" y="4151376"/>
-            <a:ext cx="2267712" cy="201168"/>
-          </a:xfrm>
-          <a:prstGeom prst="rect">
-            <a:avLst/>
-          </a:prstGeom>
-          <a:solidFill>
-            <a:srgbClr val="FFFFFF"/>
-          </a:solidFill>
-          <a:ln w="8890">
-            <a:solidFill>
-              <a:srgbClr val="B8C9D9"/>
-            </a:solidFill>
-          </a:ln>
-          <a:effectLst/>
-        </p:spPr>
-        <p:txBody>
-          <a:bodyPr rtlCol="0" anchor="ctr"/>
-          <a:lstStyle/>
-          <a:p>
-            <a:pPr algn="ctr"/>
-          </a:p>
-        </p:txBody>
-      </p:sp>
-      <p:sp>
-        <p:nvSpPr>
           <p:cNvPr id="12" name="TextBox 11"/>
           <p:cNvSpPr txBox="1"/>
           <p:nvPr/>
@@ -11886,38 +11854,6 @@
       </p:sp>
       <p:sp>
         <p:nvSpPr>
-          <p:cNvPr id="13" name="Rectangle 12"/>
-          <p:cNvSpPr/>
-          <p:nvPr/>
-        </p:nvSpPr>
-        <p:spPr>
-          <a:xfrm>
-            <a:off x="6190488" y="4151376"/>
-            <a:ext cx="2267712" cy="201168"/>
-          </a:xfrm>
-          <a:prstGeom prst="rect">
-            <a:avLst/>
-          </a:prstGeom>
-          <a:solidFill>
-            <a:srgbClr val="FFFFFF"/>
-          </a:solidFill>
-          <a:ln w="8890">
-            <a:solidFill>
-              <a:srgbClr val="B8C9D9"/>
-            </a:solidFill>
-          </a:ln>
-          <a:effectLst/>
-        </p:spPr>
-        <p:txBody>
-          <a:bodyPr rtlCol="0" anchor="ctr"/>
-          <a:lstStyle/>
-          <a:p>
-            <a:pPr algn="ctr"/>
-          </a:p>
-        </p:txBody>
-      </p:sp>
-      <p:sp>
-        <p:nvSpPr>
           <p:cNvPr id="14" name="TextBox 13"/>
           <p:cNvSpPr txBox="1"/>
           <p:nvPr/>
@@ -11964,38 +11900,6 @@
       </p:sp>
       <p:sp>
         <p:nvSpPr>
-          <p:cNvPr id="15" name="Rectangle 14"/>
-          <p:cNvSpPr/>
-          <p:nvPr/>
-        </p:nvSpPr>
-        <p:spPr>
-          <a:xfrm>
-            <a:off x="3703320" y="4718304"/>
-            <a:ext cx="2267712" cy="201168"/>
-          </a:xfrm>
-          <a:prstGeom prst="rect">
-            <a:avLst/>
-          </a:prstGeom>
-          <a:solidFill>
-            <a:srgbClr val="FFFFFF"/>
-          </a:solidFill>
-          <a:ln w="8890">
-            <a:solidFill>
-              <a:srgbClr val="B8C9D9"/>
-            </a:solidFill>
-          </a:ln>
-          <a:effectLst/>
-        </p:spPr>
-        <p:txBody>
-          <a:bodyPr rtlCol="0" anchor="ctr"/>
-          <a:lstStyle/>
-          <a:p>
-            <a:pPr algn="ctr"/>
-          </a:p>
-        </p:txBody>
-      </p:sp>
-      <p:sp>
-        <p:nvSpPr>
           <p:cNvPr id="16" name="TextBox 15"/>
           <p:cNvSpPr txBox="1"/>
           <p:nvPr/>
@@ -12042,38 +11946,6 @@
       </p:sp>
       <p:sp>
         <p:nvSpPr>
-          <p:cNvPr id="17" name="Rectangle 16"/>
-          <p:cNvSpPr/>
-          <p:nvPr/>
-        </p:nvSpPr>
-        <p:spPr>
-          <a:xfrm>
-            <a:off x="6190488" y="4718304"/>
-            <a:ext cx="2267712" cy="201168"/>
-          </a:xfrm>
-          <a:prstGeom prst="rect">
-            <a:avLst/>
-          </a:prstGeom>
-          <a:solidFill>
-            <a:srgbClr val="FFFFFF"/>
-          </a:solidFill>
-          <a:ln w="8890">
-            <a:solidFill>
-              <a:srgbClr val="B8C9D9"/>
-            </a:solidFill>
-          </a:ln>
-          <a:effectLst/>
-        </p:spPr>
-        <p:txBody>
-          <a:bodyPr rtlCol="0" anchor="ctr"/>
-          <a:lstStyle/>
-          <a:p>
-            <a:pPr algn="ctr"/>
-          </a:p>
-        </p:txBody>
-      </p:sp>
-      <p:sp>
-        <p:nvSpPr>
           <p:cNvPr id="18" name="TextBox 17"/>
           <p:cNvSpPr txBox="1"/>
           <p:nvPr/>
@@ -12120,38 +11992,6 @@
       </p:sp>
       <p:sp>
         <p:nvSpPr>
-          <p:cNvPr id="19" name="Rectangle 18"/>
-          <p:cNvSpPr/>
-          <p:nvPr/>
-        </p:nvSpPr>
-        <p:spPr>
-          <a:xfrm>
-            <a:off x="3703320" y="5285232"/>
-            <a:ext cx="2267712" cy="201168"/>
-          </a:xfrm>
-          <a:prstGeom prst="rect">
-            <a:avLst/>
-          </a:prstGeom>
-          <a:solidFill>
-            <a:srgbClr val="FFFFFF"/>
-          </a:solidFill>
-          <a:ln w="8890">
-            <a:solidFill>
-              <a:srgbClr val="B8C9D9"/>
-            </a:solidFill>
-          </a:ln>
-          <a:effectLst/>
-        </p:spPr>
-        <p:txBody>
-          <a:bodyPr rtlCol="0" anchor="ctr"/>
-          <a:lstStyle/>
-          <a:p>
-            <a:pPr algn="ctr"/>
-          </a:p>
-        </p:txBody>
-      </p:sp>
-      <p:sp>
-        <p:nvSpPr>
           <p:cNvPr id="20" name="TextBox 19"/>
           <p:cNvSpPr txBox="1"/>
           <p:nvPr/>
@@ -12193,6 +12033,110 @@
               </a:rPr>
               <a:t>Universidad Privada Domingo Savio</a:t>
             </a:r>
+          </a:p>
+        </p:txBody>
+      </p:sp>
+      <p:sp>
+        <p:nvSpPr>
+          <p:cNvPr id="22" name="Rounded Rectangle 21"/>
+          <p:cNvSpPr/>
+          <p:nvPr/>
+        </p:nvSpPr>
+        <p:spPr>
+          <a:gradFill rotWithShape="1">
+            <a:gsLst>
+              <a:gs pos="0">
+                <a:srgbClr val="16B9B0"/>
+              </a:gs>
+              <a:gs pos="42000">
+                <a:srgbClr val="F5C66A"/>
+              </a:gs>
+              <a:gs pos="72000">
+                <a:srgbClr val="6D7BF7"/>
+              </a:gs>
+              <a:gs pos="100000">
+                <a:srgbClr val="16B9B0"/>
+              </a:gs>
+            </a:gsLst>
+            <a:lin ang="2700000" scaled="1"/>
+          </a:gradFill>
+          <a:xfrm>
+            <a:off x="5230368" y="2084831"/>
+            <a:ext cx="1828800" cy="1426464"/>
+          </a:xfrm>
+          <a:prstGeom prst="roundRect">
+            <a:avLst/>
+          </a:prstGeom>
+          <a:ln w="13970">
+            <a:solidFill>
+              <a:srgbClr val="FFFFFF"/>
+            </a:solidFill>
+          </a:ln>
+        </p:spPr>
+        <p:style>
+          <a:lnRef idx="1">
+            <a:schemeClr val="accent1"/>
+          </a:lnRef>
+          <a:fillRef idx="3">
+            <a:schemeClr val="accent1"/>
+          </a:fillRef>
+          <a:effectRef idx="2">
+            <a:schemeClr val="accent1"/>
+          </a:effectRef>
+          <a:fontRef idx="minor">
+            <a:schemeClr val="lt1"/>
+          </a:fontRef>
+        </p:style>
+        <p:txBody>
+          <a:bodyPr rtlCol="0" anchor="ctr"/>
+          <a:lstStyle/>
+          <a:p>
+            <a:pPr algn="ctr"/>
+          </a:p>
+        </p:txBody>
+      </p:sp>
+      <p:sp>
+        <p:nvSpPr>
+          <p:cNvPr id="23" name="Rounded Rectangle 22"/>
+          <p:cNvSpPr/>
+          <p:nvPr/>
+        </p:nvSpPr>
+        <p:spPr>
+          <a:xfrm>
+            <a:off x="5253228" y="2107692"/>
+            <a:ext cx="1783080" cy="1380744"/>
+          </a:xfrm>
+          <a:prstGeom prst="roundRect">
+            <a:avLst/>
+          </a:prstGeom>
+          <a:solidFill>
+            <a:srgbClr val="F8FAFC"/>
+          </a:solidFill>
+          <a:ln w="10160">
+            <a:solidFill>
+              <a:srgbClr val="FFFFFF"/>
+            </a:solidFill>
+          </a:ln>
+        </p:spPr>
+        <p:style>
+          <a:lnRef idx="1">
+            <a:schemeClr val="accent1"/>
+          </a:lnRef>
+          <a:fillRef idx="3">
+            <a:schemeClr val="accent1"/>
+          </a:fillRef>
+          <a:effectRef idx="2">
+            <a:schemeClr val="accent1"/>
+          </a:effectRef>
+          <a:fontRef idx="minor">
+            <a:schemeClr val="lt1"/>
+          </a:fontRef>
+        </p:style>
+        <p:txBody>
+          <a:bodyPr rtlCol="0" anchor="ctr"/>
+          <a:lstStyle/>
+          <a:p>
+            <a:pPr algn="ctr"/>
           </a:p>
         </p:txBody>
       </p:sp>
@@ -12212,8 +12156,8 @@
         </p:blipFill>
         <p:spPr>
           <a:xfrm>
-            <a:off x="5239512" y="2148840"/>
-            <a:ext cx="1810512" cy="1357884"/>
+            <a:off x="5340096" y="2139696"/>
+            <a:ext cx="1609344" cy="1207008"/>
           </a:xfrm>
           <a:prstGeom prst="rect">
             <a:avLst/>
@@ -13035,6 +12979,134 @@
           </a:p>
         </p:txBody>
       </p:sp>
+      <p:sp>
+        <p:nvSpPr>
+          <p:cNvPr id="21" name="Rounded Rectangle 20"/>
+          <p:cNvSpPr/>
+          <p:nvPr/>
+        </p:nvSpPr>
+        <p:spPr>
+          <a:gradFill rotWithShape="1">
+            <a:gsLst>
+              <a:gs pos="0">
+                <a:srgbClr val="16B9B0"/>
+              </a:gs>
+              <a:gs pos="42000">
+                <a:srgbClr val="F5C66A"/>
+              </a:gs>
+              <a:gs pos="72000">
+                <a:srgbClr val="6D7BF7"/>
+              </a:gs>
+              <a:gs pos="100000">
+                <a:srgbClr val="16B9B0"/>
+              </a:gs>
+            </a:gsLst>
+            <a:lin ang="2700000" scaled="1"/>
+          </a:gradFill>
+          <a:xfrm>
+            <a:off x="8266175" y="6245352"/>
+            <a:ext cx="768096" cy="576072"/>
+          </a:xfrm>
+          <a:prstGeom prst="roundRect">
+            <a:avLst/>
+          </a:prstGeom>
+          <a:ln w="13970">
+            <a:solidFill>
+              <a:srgbClr val="FFFFFF"/>
+            </a:solidFill>
+          </a:ln>
+        </p:spPr>
+        <p:style>
+          <a:lnRef idx="1">
+            <a:schemeClr val="accent1"/>
+          </a:lnRef>
+          <a:fillRef idx="3">
+            <a:schemeClr val="accent1"/>
+          </a:fillRef>
+          <a:effectRef idx="2">
+            <a:schemeClr val="accent1"/>
+          </a:effectRef>
+          <a:fontRef idx="minor">
+            <a:schemeClr val="lt1"/>
+          </a:fontRef>
+        </p:style>
+        <p:txBody>
+          <a:bodyPr rtlCol="0" anchor="ctr"/>
+          <a:lstStyle/>
+          <a:p>
+            <a:pPr algn="ctr"/>
+          </a:p>
+        </p:txBody>
+      </p:sp>
+      <p:sp>
+        <p:nvSpPr>
+          <p:cNvPr id="22" name="Rounded Rectangle 21"/>
+          <p:cNvSpPr/>
+          <p:nvPr/>
+        </p:nvSpPr>
+        <p:spPr>
+          <a:xfrm>
+            <a:off x="8289036" y="6268212"/>
+            <a:ext cx="722375" cy="530352"/>
+          </a:xfrm>
+          <a:prstGeom prst="roundRect">
+            <a:avLst/>
+          </a:prstGeom>
+          <a:solidFill>
+            <a:srgbClr val="F8FAFC"/>
+          </a:solidFill>
+          <a:ln w="10160">
+            <a:solidFill>
+              <a:srgbClr val="FFFFFF"/>
+            </a:solidFill>
+          </a:ln>
+        </p:spPr>
+        <p:style>
+          <a:lnRef idx="1">
+            <a:schemeClr val="accent1"/>
+          </a:lnRef>
+          <a:fillRef idx="3">
+            <a:schemeClr val="accent1"/>
+          </a:fillRef>
+          <a:effectRef idx="2">
+            <a:schemeClr val="accent1"/>
+          </a:effectRef>
+          <a:fontRef idx="minor">
+            <a:schemeClr val="lt1"/>
+          </a:fontRef>
+        </p:style>
+        <p:txBody>
+          <a:bodyPr rtlCol="0" anchor="ctr"/>
+          <a:lstStyle/>
+          <a:p>
+            <a:pPr algn="ctr"/>
+          </a:p>
+        </p:txBody>
+      </p:sp>
+      <p:pic>
+        <p:nvPicPr>
+          <p:cNvPr id="23" name="Picture 22" descr="image.jpg"/>
+          <p:cNvPicPr>
+            <a:picLocks noChangeAspect="1"/>
+          </p:cNvPicPr>
+          <p:nvPr/>
+        </p:nvPicPr>
+        <p:blipFill>
+          <a:blip r:embed="rId2"/>
+          <a:stretch>
+            <a:fillRect/>
+          </a:stretch>
+        </p:blipFill>
+        <p:spPr>
+          <a:xfrm>
+            <a:off x="8321040" y="6286500"/>
+            <a:ext cx="658368" cy="493776"/>
+          </a:xfrm>
+          <a:prstGeom prst="rect">
+            <a:avLst/>
+          </a:prstGeom>
+        </p:spPr>
+      </p:pic>
     </p:spTree>
   </p:cSld>
   <p:clrMapOvr>
@@ -13344,7 +13416,8 @@
                 </a:solidFill>
                 <a:latin typeface="Calibri"/>
               </a:rPr>
-              <a:t>idUsuario: entero</a:t>
+              <a:t>idAutor: entero
+nombre: texto</a:t>
             </a:r>
           </a:p>
           <a:p>
@@ -13366,7 +13439,7 @@
                 </a:solidFill>
                 <a:latin typeface="Calibri"/>
               </a:rPr>
-              <a:t>nombre: texto</a:t>
+              <a:t/>
             </a:r>
           </a:p>
         </p:txBody>
@@ -13444,7 +13517,7 @@
                 </a:solidFill>
                 <a:latin typeface="Calibri"/>
               </a:rPr>
-              <a:t>EDITORIAL</a:t>
+              <a:t>OBRA</a:t>
             </a:r>
           </a:p>
         </p:txBody>
@@ -13490,7 +13563,9 @@
                 </a:solidFill>
                 <a:latin typeface="Calibri"/>
               </a:rPr>
-              <a:t>idPrestamo: entero</a:t>
+              <a:t>idObra: entero
+título: texto
+isbn: texto</a:t>
             </a:r>
           </a:p>
           <a:p>
@@ -13512,7 +13587,7 @@
                 </a:solidFill>
                 <a:latin typeface="Calibri"/>
               </a:rPr>
-              <a:t>fecha: fecha</a:t>
+              <a:t/>
             </a:r>
           </a:p>
           <a:p>
@@ -13534,7 +13609,7 @@
                 </a:solidFill>
                 <a:latin typeface="Calibri"/>
               </a:rPr>
-              <a:t>registrarDevolucion()</a:t>
+              <a:t/>
             </a:r>
           </a:p>
         </p:txBody>
@@ -13794,7 +13869,7 @@
                 </a:solidFill>
                 <a:latin typeface="Calibri"/>
               </a:rPr>
-              <a:t>1  —  0..*</a:t>
+              <a:t>0..*  —  0..*</a:t>
             </a:r>
           </a:p>
         </p:txBody>
@@ -13840,7 +13915,7 @@
                 </a:solidFill>
                 <a:latin typeface="Calibri"/>
               </a:rPr>
-              <a:t>0..*  —  1</a:t>
+              <a:t>1  —  0..*</a:t>
             </a:r>
           </a:p>
         </p:txBody>
@@ -13946,6 +14021,134 @@
           </a:p>
         </p:txBody>
       </p:sp>
+      <p:sp>
+        <p:nvSpPr>
+          <p:cNvPr id="22" name="Rounded Rectangle 21"/>
+          <p:cNvSpPr/>
+          <p:nvPr/>
+        </p:nvSpPr>
+        <p:spPr>
+          <a:gradFill rotWithShape="1">
+            <a:gsLst>
+              <a:gs pos="0">
+                <a:srgbClr val="16B9B0"/>
+              </a:gs>
+              <a:gs pos="42000">
+                <a:srgbClr val="F5C66A"/>
+              </a:gs>
+              <a:gs pos="72000">
+                <a:srgbClr val="6D7BF7"/>
+              </a:gs>
+              <a:gs pos="100000">
+                <a:srgbClr val="16B9B0"/>
+              </a:gs>
+            </a:gsLst>
+            <a:lin ang="2700000" scaled="1"/>
+          </a:gradFill>
+          <a:xfrm>
+            <a:off x="8266175" y="6245352"/>
+            <a:ext cx="768096" cy="576072"/>
+          </a:xfrm>
+          <a:prstGeom prst="roundRect">
+            <a:avLst/>
+          </a:prstGeom>
+          <a:ln w="13970">
+            <a:solidFill>
+              <a:srgbClr val="FFFFFF"/>
+            </a:solidFill>
+          </a:ln>
+        </p:spPr>
+        <p:style>
+          <a:lnRef idx="1">
+            <a:schemeClr val="accent1"/>
+          </a:lnRef>
+          <a:fillRef idx="3">
+            <a:schemeClr val="accent1"/>
+          </a:fillRef>
+          <a:effectRef idx="2">
+            <a:schemeClr val="accent1"/>
+          </a:effectRef>
+          <a:fontRef idx="minor">
+            <a:schemeClr val="lt1"/>
+          </a:fontRef>
+        </p:style>
+        <p:txBody>
+          <a:bodyPr rtlCol="0" anchor="ctr"/>
+          <a:lstStyle/>
+          <a:p>
+            <a:pPr algn="ctr"/>
+          </a:p>
+        </p:txBody>
+      </p:sp>
+      <p:sp>
+        <p:nvSpPr>
+          <p:cNvPr id="23" name="Rounded Rectangle 22"/>
+          <p:cNvSpPr/>
+          <p:nvPr/>
+        </p:nvSpPr>
+        <p:spPr>
+          <a:xfrm>
+            <a:off x="8289036" y="6268212"/>
+            <a:ext cx="722375" cy="530352"/>
+          </a:xfrm>
+          <a:prstGeom prst="roundRect">
+            <a:avLst/>
+          </a:prstGeom>
+          <a:solidFill>
+            <a:srgbClr val="F8FAFC"/>
+          </a:solidFill>
+          <a:ln w="10160">
+            <a:solidFill>
+              <a:srgbClr val="FFFFFF"/>
+            </a:solidFill>
+          </a:ln>
+        </p:spPr>
+        <p:style>
+          <a:lnRef idx="1">
+            <a:schemeClr val="accent1"/>
+          </a:lnRef>
+          <a:fillRef idx="3">
+            <a:schemeClr val="accent1"/>
+          </a:fillRef>
+          <a:effectRef idx="2">
+            <a:schemeClr val="accent1"/>
+          </a:effectRef>
+          <a:fontRef idx="minor">
+            <a:schemeClr val="lt1"/>
+          </a:fontRef>
+        </p:style>
+        <p:txBody>
+          <a:bodyPr rtlCol="0" anchor="ctr"/>
+          <a:lstStyle/>
+          <a:p>
+            <a:pPr algn="ctr"/>
+          </a:p>
+        </p:txBody>
+      </p:sp>
+      <p:pic>
+        <p:nvPicPr>
+          <p:cNvPr id="24" name="Picture 23" descr="image.jpg"/>
+          <p:cNvPicPr>
+            <a:picLocks noChangeAspect="1"/>
+          </p:cNvPicPr>
+          <p:nvPr/>
+        </p:nvPicPr>
+        <p:blipFill>
+          <a:blip r:embed="rId2"/>
+          <a:stretch>
+            <a:fillRect/>
+          </a:stretch>
+        </p:blipFill>
+        <p:spPr>
+          <a:xfrm>
+            <a:off x="8321040" y="6286500"/>
+            <a:ext cx="658368" cy="493776"/>
+          </a:xfrm>
+          <a:prstGeom prst="rect">
+            <a:avLst/>
+          </a:prstGeom>
+        </p:spPr>
+      </p:pic>
     </p:spTree>
   </p:cSld>
   <p:clrMapOvr>
@@ -15439,6 +15642,134 @@
           </a:p>
         </p:txBody>
       </p:sp>
+      <p:sp>
+        <p:nvSpPr>
+          <p:cNvPr id="38" name="Rounded Rectangle 37"/>
+          <p:cNvSpPr/>
+          <p:nvPr/>
+        </p:nvSpPr>
+        <p:spPr>
+          <a:gradFill rotWithShape="1">
+            <a:gsLst>
+              <a:gs pos="0">
+                <a:srgbClr val="16B9B0"/>
+              </a:gs>
+              <a:gs pos="42000">
+                <a:srgbClr val="F5C66A"/>
+              </a:gs>
+              <a:gs pos="72000">
+                <a:srgbClr val="6D7BF7"/>
+              </a:gs>
+              <a:gs pos="100000">
+                <a:srgbClr val="16B9B0"/>
+              </a:gs>
+            </a:gsLst>
+            <a:lin ang="2700000" scaled="1"/>
+          </a:gradFill>
+          <a:xfrm>
+            <a:off x="8266175" y="6245352"/>
+            <a:ext cx="768096" cy="576072"/>
+          </a:xfrm>
+          <a:prstGeom prst="roundRect">
+            <a:avLst/>
+          </a:prstGeom>
+          <a:ln w="13970">
+            <a:solidFill>
+              <a:srgbClr val="FFFFFF"/>
+            </a:solidFill>
+          </a:ln>
+        </p:spPr>
+        <p:style>
+          <a:lnRef idx="1">
+            <a:schemeClr val="accent1"/>
+          </a:lnRef>
+          <a:fillRef idx="3">
+            <a:schemeClr val="accent1"/>
+          </a:fillRef>
+          <a:effectRef idx="2">
+            <a:schemeClr val="accent1"/>
+          </a:effectRef>
+          <a:fontRef idx="minor">
+            <a:schemeClr val="lt1"/>
+          </a:fontRef>
+        </p:style>
+        <p:txBody>
+          <a:bodyPr rtlCol="0" anchor="ctr"/>
+          <a:lstStyle/>
+          <a:p>
+            <a:pPr algn="ctr"/>
+          </a:p>
+        </p:txBody>
+      </p:sp>
+      <p:sp>
+        <p:nvSpPr>
+          <p:cNvPr id="39" name="Rounded Rectangle 38"/>
+          <p:cNvSpPr/>
+          <p:nvPr/>
+        </p:nvSpPr>
+        <p:spPr>
+          <a:xfrm>
+            <a:off x="8289036" y="6268212"/>
+            <a:ext cx="722375" cy="530352"/>
+          </a:xfrm>
+          <a:prstGeom prst="roundRect">
+            <a:avLst/>
+          </a:prstGeom>
+          <a:solidFill>
+            <a:srgbClr val="F8FAFC"/>
+          </a:solidFill>
+          <a:ln w="10160">
+            <a:solidFill>
+              <a:srgbClr val="FFFFFF"/>
+            </a:solidFill>
+          </a:ln>
+        </p:spPr>
+        <p:style>
+          <a:lnRef idx="1">
+            <a:schemeClr val="accent1"/>
+          </a:lnRef>
+          <a:fillRef idx="3">
+            <a:schemeClr val="accent1"/>
+          </a:fillRef>
+          <a:effectRef idx="2">
+            <a:schemeClr val="accent1"/>
+          </a:effectRef>
+          <a:fontRef idx="minor">
+            <a:schemeClr val="lt1"/>
+          </a:fontRef>
+        </p:style>
+        <p:txBody>
+          <a:bodyPr rtlCol="0" anchor="ctr"/>
+          <a:lstStyle/>
+          <a:p>
+            <a:pPr algn="ctr"/>
+          </a:p>
+        </p:txBody>
+      </p:sp>
+      <p:pic>
+        <p:nvPicPr>
+          <p:cNvPr id="40" name="Picture 39" descr="image.jpg"/>
+          <p:cNvPicPr>
+            <a:picLocks noChangeAspect="1"/>
+          </p:cNvPicPr>
+          <p:nvPr/>
+        </p:nvPicPr>
+        <p:blipFill>
+          <a:blip r:embed="rId2"/>
+          <a:stretch>
+            <a:fillRect/>
+          </a:stretch>
+        </p:blipFill>
+        <p:spPr>
+          <a:xfrm>
+            <a:off x="8321040" y="6286500"/>
+            <a:ext cx="658368" cy="493776"/>
+          </a:xfrm>
+          <a:prstGeom prst="rect">
+            <a:avLst/>
+          </a:prstGeom>
+        </p:spPr>
+      </p:pic>
     </p:spTree>
   </p:cSld>
   <p:clrMapOvr>
@@ -15702,7 +16033,7 @@
                 </a:solidFill>
                 <a:latin typeface="Calibri"/>
               </a:rPr>
-              <a:t>AUTOR 1 → N EDITORIAL</a:t>
+              <a:t>AUTOR N : M OBRA</a:t>
             </a:r>
           </a:p>
         </p:txBody>
@@ -15748,7 +16079,7 @@
                 </a:solidFill>
                 <a:latin typeface="Calibri"/>
               </a:rPr>
-              <a:t>id_usuario aparece como FK en EDITORIAL</a:t>
+              <a:t>Se representa con OBRA_AUTOR (id_obra, id_autor)</a:t>
             </a:r>
           </a:p>
         </p:txBody>
@@ -15826,7 +16157,7 @@
                 </a:solidFill>
                 <a:latin typeface="Calibri"/>
               </a:rPr>
-              <a:t>EJEMPLAR 1 → N EDITORIAL</a:t>
+              <a:t>EDITORIAL 1 : N OBRA</a:t>
             </a:r>
           </a:p>
         </p:txBody>
@@ -15872,7 +16203,7 @@
                 </a:solidFill>
                 <a:latin typeface="Calibri"/>
               </a:rPr>
-              <a:t>Cada copia pertenece a una obra</a:t>
+              <a:t>id_editorial se referencia desde OBRA</a:t>
             </a:r>
           </a:p>
         </p:txBody>
@@ -15950,7 +16281,7 @@
                 </a:solidFill>
                 <a:latin typeface="Calibri"/>
               </a:rPr>
-              <a:t>OBRA 1 → N EJEMPLAR</a:t>
+              <a:t>OBRA 1 : N EJEMPLAR</a:t>
             </a:r>
           </a:p>
         </p:txBody>
@@ -15996,7 +16327,7 @@
                 </a:solidFill>
                 <a:latin typeface="Calibri"/>
               </a:rPr>
-              <a:t>Una editorial puede publicar varias obras</a:t>
+              <a:t>id_obra se referencia desde EJEMPLAR</a:t>
             </a:r>
           </a:p>
         </p:txBody>
@@ -16074,7 +16405,7 @@
                 </a:solidFill>
                 <a:latin typeface="Calibri"/>
               </a:rPr>
-              <a:t>AUTOR + EJEMPLAR → RESERVA</a:t>
+              <a:t>EJEMPLAR 1 : N RESERVA</a:t>
             </a:r>
           </a:p>
         </p:txBody>
@@ -16120,7 +16451,7 @@
                 </a:solidFill>
                 <a:latin typeface="Calibri"/>
               </a:rPr>
-              <a:t>La ficha puede ofrecer una opción de reserva</a:t>
+              <a:t>id_ejemplar se referencia desde RESERVA</a:t>
             </a:r>
           </a:p>
         </p:txBody>
@@ -16260,6 +16591,134 @@
           </a:p>
         </p:txBody>
       </p:sp>
+      <p:sp>
+        <p:nvSpPr>
+          <p:cNvPr id="22" name="Rounded Rectangle 21"/>
+          <p:cNvSpPr/>
+          <p:nvPr/>
+        </p:nvSpPr>
+        <p:spPr>
+          <a:gradFill rotWithShape="1">
+            <a:gsLst>
+              <a:gs pos="0">
+                <a:srgbClr val="16B9B0"/>
+              </a:gs>
+              <a:gs pos="42000">
+                <a:srgbClr val="F5C66A"/>
+              </a:gs>
+              <a:gs pos="72000">
+                <a:srgbClr val="6D7BF7"/>
+              </a:gs>
+              <a:gs pos="100000">
+                <a:srgbClr val="16B9B0"/>
+              </a:gs>
+            </a:gsLst>
+            <a:lin ang="2700000" scaled="1"/>
+          </a:gradFill>
+          <a:xfrm>
+            <a:off x="8266175" y="6245352"/>
+            <a:ext cx="768096" cy="576072"/>
+          </a:xfrm>
+          <a:prstGeom prst="roundRect">
+            <a:avLst/>
+          </a:prstGeom>
+          <a:ln w="13970">
+            <a:solidFill>
+              <a:srgbClr val="FFFFFF"/>
+            </a:solidFill>
+          </a:ln>
+        </p:spPr>
+        <p:style>
+          <a:lnRef idx="1">
+            <a:schemeClr val="accent1"/>
+          </a:lnRef>
+          <a:fillRef idx="3">
+            <a:schemeClr val="accent1"/>
+          </a:fillRef>
+          <a:effectRef idx="2">
+            <a:schemeClr val="accent1"/>
+          </a:effectRef>
+          <a:fontRef idx="minor">
+            <a:schemeClr val="lt1"/>
+          </a:fontRef>
+        </p:style>
+        <p:txBody>
+          <a:bodyPr rtlCol="0" anchor="ctr"/>
+          <a:lstStyle/>
+          <a:p>
+            <a:pPr algn="ctr"/>
+          </a:p>
+        </p:txBody>
+      </p:sp>
+      <p:sp>
+        <p:nvSpPr>
+          <p:cNvPr id="23" name="Rounded Rectangle 22"/>
+          <p:cNvSpPr/>
+          <p:nvPr/>
+        </p:nvSpPr>
+        <p:spPr>
+          <a:xfrm>
+            <a:off x="8289036" y="6268212"/>
+            <a:ext cx="722375" cy="530352"/>
+          </a:xfrm>
+          <a:prstGeom prst="roundRect">
+            <a:avLst/>
+          </a:prstGeom>
+          <a:solidFill>
+            <a:srgbClr val="F8FAFC"/>
+          </a:solidFill>
+          <a:ln w="10160">
+            <a:solidFill>
+              <a:srgbClr val="FFFFFF"/>
+            </a:solidFill>
+          </a:ln>
+        </p:spPr>
+        <p:style>
+          <a:lnRef idx="1">
+            <a:schemeClr val="accent1"/>
+          </a:lnRef>
+          <a:fillRef idx="3">
+            <a:schemeClr val="accent1"/>
+          </a:fillRef>
+          <a:effectRef idx="2">
+            <a:schemeClr val="accent1"/>
+          </a:effectRef>
+          <a:fontRef idx="minor">
+            <a:schemeClr val="lt1"/>
+          </a:fontRef>
+        </p:style>
+        <p:txBody>
+          <a:bodyPr rtlCol="0" anchor="ctr"/>
+          <a:lstStyle/>
+          <a:p>
+            <a:pPr algn="ctr"/>
+          </a:p>
+        </p:txBody>
+      </p:sp>
+      <p:pic>
+        <p:nvPicPr>
+          <p:cNvPr id="24" name="Picture 23" descr="image.jpg"/>
+          <p:cNvPicPr>
+            <a:picLocks noChangeAspect="1"/>
+          </p:cNvPicPr>
+          <p:nvPr/>
+        </p:nvPicPr>
+        <p:blipFill>
+          <a:blip r:embed="rId2"/>
+          <a:stretch>
+            <a:fillRect/>
+          </a:stretch>
+        </p:blipFill>
+        <p:spPr>
+          <a:xfrm>
+            <a:off x="8321040" y="6286500"/>
+            <a:ext cx="658368" cy="493776"/>
+          </a:xfrm>
+          <a:prstGeom prst="rect">
+            <a:avLst/>
+          </a:prstGeom>
+        </p:spPr>
+      </p:pic>
     </p:spTree>
   </p:cSld>
   <p:clrMapOvr>
@@ -16952,6 +17411,134 @@
           </a:p>
         </p:txBody>
       </p:sp>
+      <p:sp>
+        <p:nvSpPr>
+          <p:cNvPr id="17" name="Rounded Rectangle 16"/>
+          <p:cNvSpPr/>
+          <p:nvPr/>
+        </p:nvSpPr>
+        <p:spPr>
+          <a:gradFill rotWithShape="1">
+            <a:gsLst>
+              <a:gs pos="0">
+                <a:srgbClr val="16B9B0"/>
+              </a:gs>
+              <a:gs pos="42000">
+                <a:srgbClr val="F5C66A"/>
+              </a:gs>
+              <a:gs pos="72000">
+                <a:srgbClr val="6D7BF7"/>
+              </a:gs>
+              <a:gs pos="100000">
+                <a:srgbClr val="16B9B0"/>
+              </a:gs>
+            </a:gsLst>
+            <a:lin ang="2700000" scaled="1"/>
+          </a:gradFill>
+          <a:xfrm>
+            <a:off x="8266175" y="6245352"/>
+            <a:ext cx="768096" cy="576072"/>
+          </a:xfrm>
+          <a:prstGeom prst="roundRect">
+            <a:avLst/>
+          </a:prstGeom>
+          <a:ln w="13970">
+            <a:solidFill>
+              <a:srgbClr val="FFFFFF"/>
+            </a:solidFill>
+          </a:ln>
+        </p:spPr>
+        <p:style>
+          <a:lnRef idx="1">
+            <a:schemeClr val="accent1"/>
+          </a:lnRef>
+          <a:fillRef idx="3">
+            <a:schemeClr val="accent1"/>
+          </a:fillRef>
+          <a:effectRef idx="2">
+            <a:schemeClr val="accent1"/>
+          </a:effectRef>
+          <a:fontRef idx="minor">
+            <a:schemeClr val="lt1"/>
+          </a:fontRef>
+        </p:style>
+        <p:txBody>
+          <a:bodyPr rtlCol="0" anchor="ctr"/>
+          <a:lstStyle/>
+          <a:p>
+            <a:pPr algn="ctr"/>
+          </a:p>
+        </p:txBody>
+      </p:sp>
+      <p:sp>
+        <p:nvSpPr>
+          <p:cNvPr id="18" name="Rounded Rectangle 17"/>
+          <p:cNvSpPr/>
+          <p:nvPr/>
+        </p:nvSpPr>
+        <p:spPr>
+          <a:xfrm>
+            <a:off x="8289036" y="6268212"/>
+            <a:ext cx="722375" cy="530352"/>
+          </a:xfrm>
+          <a:prstGeom prst="roundRect">
+            <a:avLst/>
+          </a:prstGeom>
+          <a:solidFill>
+            <a:srgbClr val="F8FAFC"/>
+          </a:solidFill>
+          <a:ln w="10160">
+            <a:solidFill>
+              <a:srgbClr val="FFFFFF"/>
+            </a:solidFill>
+          </a:ln>
+        </p:spPr>
+        <p:style>
+          <a:lnRef idx="1">
+            <a:schemeClr val="accent1"/>
+          </a:lnRef>
+          <a:fillRef idx="3">
+            <a:schemeClr val="accent1"/>
+          </a:fillRef>
+          <a:effectRef idx="2">
+            <a:schemeClr val="accent1"/>
+          </a:effectRef>
+          <a:fontRef idx="minor">
+            <a:schemeClr val="lt1"/>
+          </a:fontRef>
+        </p:style>
+        <p:txBody>
+          <a:bodyPr rtlCol="0" anchor="ctr"/>
+          <a:lstStyle/>
+          <a:p>
+            <a:pPr algn="ctr"/>
+          </a:p>
+        </p:txBody>
+      </p:sp>
+      <p:pic>
+        <p:nvPicPr>
+          <p:cNvPr id="19" name="Picture 18" descr="image.jpg"/>
+          <p:cNvPicPr>
+            <a:picLocks noChangeAspect="1"/>
+          </p:cNvPicPr>
+          <p:nvPr/>
+        </p:nvPicPr>
+        <p:blipFill>
+          <a:blip r:embed="rId2"/>
+          <a:stretch>
+            <a:fillRect/>
+          </a:stretch>
+        </p:blipFill>
+        <p:spPr>
+          <a:xfrm>
+            <a:off x="8321040" y="6286500"/>
+            <a:ext cx="658368" cy="493776"/>
+          </a:xfrm>
+          <a:prstGeom prst="rect">
+            <a:avLst/>
+          </a:prstGeom>
+        </p:spPr>
+      </p:pic>
     </p:spTree>
   </p:cSld>
   <p:clrMapOvr>
@@ -18001,6 +18588,134 @@
           </a:p>
         </p:txBody>
       </p:sp>
+      <p:sp>
+        <p:nvSpPr>
+          <p:cNvPr id="25" name="Rounded Rectangle 24"/>
+          <p:cNvSpPr/>
+          <p:nvPr/>
+        </p:nvSpPr>
+        <p:spPr>
+          <a:gradFill rotWithShape="1">
+            <a:gsLst>
+              <a:gs pos="0">
+                <a:srgbClr val="16B9B0"/>
+              </a:gs>
+              <a:gs pos="42000">
+                <a:srgbClr val="F5C66A"/>
+              </a:gs>
+              <a:gs pos="72000">
+                <a:srgbClr val="6D7BF7"/>
+              </a:gs>
+              <a:gs pos="100000">
+                <a:srgbClr val="16B9B0"/>
+              </a:gs>
+            </a:gsLst>
+            <a:lin ang="2700000" scaled="1"/>
+          </a:gradFill>
+          <a:xfrm>
+            <a:off x="8266175" y="6245352"/>
+            <a:ext cx="768096" cy="576072"/>
+          </a:xfrm>
+          <a:prstGeom prst="roundRect">
+            <a:avLst/>
+          </a:prstGeom>
+          <a:ln w="13970">
+            <a:solidFill>
+              <a:srgbClr val="FFFFFF"/>
+            </a:solidFill>
+          </a:ln>
+        </p:spPr>
+        <p:style>
+          <a:lnRef idx="1">
+            <a:schemeClr val="accent1"/>
+          </a:lnRef>
+          <a:fillRef idx="3">
+            <a:schemeClr val="accent1"/>
+          </a:fillRef>
+          <a:effectRef idx="2">
+            <a:schemeClr val="accent1"/>
+          </a:effectRef>
+          <a:fontRef idx="minor">
+            <a:schemeClr val="lt1"/>
+          </a:fontRef>
+        </p:style>
+        <p:txBody>
+          <a:bodyPr rtlCol="0" anchor="ctr"/>
+          <a:lstStyle/>
+          <a:p>
+            <a:pPr algn="ctr"/>
+          </a:p>
+        </p:txBody>
+      </p:sp>
+      <p:sp>
+        <p:nvSpPr>
+          <p:cNvPr id="26" name="Rounded Rectangle 25"/>
+          <p:cNvSpPr/>
+          <p:nvPr/>
+        </p:nvSpPr>
+        <p:spPr>
+          <a:xfrm>
+            <a:off x="8289036" y="6268212"/>
+            <a:ext cx="722375" cy="530352"/>
+          </a:xfrm>
+          <a:prstGeom prst="roundRect">
+            <a:avLst/>
+          </a:prstGeom>
+          <a:solidFill>
+            <a:srgbClr val="F8FAFC"/>
+          </a:solidFill>
+          <a:ln w="10160">
+            <a:solidFill>
+              <a:srgbClr val="FFFFFF"/>
+            </a:solidFill>
+          </a:ln>
+        </p:spPr>
+        <p:style>
+          <a:lnRef idx="1">
+            <a:schemeClr val="accent1"/>
+          </a:lnRef>
+          <a:fillRef idx="3">
+            <a:schemeClr val="accent1"/>
+          </a:fillRef>
+          <a:effectRef idx="2">
+            <a:schemeClr val="accent1"/>
+          </a:effectRef>
+          <a:fontRef idx="minor">
+            <a:schemeClr val="lt1"/>
+          </a:fontRef>
+        </p:style>
+        <p:txBody>
+          <a:bodyPr rtlCol="0" anchor="ctr"/>
+          <a:lstStyle/>
+          <a:p>
+            <a:pPr algn="ctr"/>
+          </a:p>
+        </p:txBody>
+      </p:sp>
+      <p:pic>
+        <p:nvPicPr>
+          <p:cNvPr id="27" name="Picture 26" descr="image.jpg"/>
+          <p:cNvPicPr>
+            <a:picLocks noChangeAspect="1"/>
+          </p:cNvPicPr>
+          <p:nvPr/>
+        </p:nvPicPr>
+        <p:blipFill>
+          <a:blip r:embed="rId3"/>
+          <a:stretch>
+            <a:fillRect/>
+          </a:stretch>
+        </p:blipFill>
+        <p:spPr>
+          <a:xfrm>
+            <a:off x="8321040" y="6286500"/>
+            <a:ext cx="658368" cy="493776"/>
+          </a:xfrm>
+          <a:prstGeom prst="rect">
+            <a:avLst/>
+          </a:prstGeom>
+        </p:spPr>
+      </p:pic>
     </p:spTree>
   </p:cSld>
   <p:clrMapOvr>
@@ -18094,7 +18809,7 @@
                 </a:solidFill>
                 <a:latin typeface="Calibri Light"/>
               </a:rPr>
-              <a:t>Tres libros en español disponibles en catálogos bolivianos</a:t>
+              <a:t>Referencias bibliográficas</a:t>
             </a:r>
           </a:p>
         </p:txBody>
@@ -18266,7 +18981,7 @@
                 </a:solidFill>
                 <a:latin typeface="Calibri"/>
               </a:rPr>
-              <a:t>DIGITAL · BIBLIOTECA UCB · LIBRO 1</a:t>
+              <a:t>DIGITAL · LIBRO 1</a:t>
             </a:r>
           </a:p>
         </p:txBody>
@@ -18486,7 +19201,7 @@
                 </a:solidFill>
                 <a:latin typeface="Calibri"/>
               </a:rPr>
-              <a:t>DIGITAL · BIBLIOTECA UCB · LIBRO 2</a:t>
+              <a:t>DIGITAL · LIBRO 2</a:t>
             </a:r>
           </a:p>
         </p:txBody>
@@ -18706,7 +19421,7 @@
                 </a:solidFill>
                 <a:latin typeface="Calibri"/>
               </a:rPr>
-              <a:t>IMPRESO · CATÁLOGO UPDS</a:t>
+              <a:t>IMPRESO · LIBRO 3</a:t>
             </a:r>
           </a:p>
         </p:txBody>
@@ -18846,66 +19561,139 @@
                 </a:solidFill>
                 <a:latin typeface="Calibri"/>
               </a:rPr>
-              <a:t>Consultar ficha UPDS ↗</a:t>
+              <a:t>Consultar ficha bibliográfica ↗</a:t>
             </a:r>
           </a:p>
         </p:txBody>
       </p:sp>
       <p:sp>
         <p:nvSpPr>
-          <p:cNvPr id="22" name="TextBox 21"/>
-          <p:cNvSpPr txBox="1"/>
+          <p:cNvPr id="23" name="Rounded Rectangle 22"/>
+          <p:cNvSpPr/>
           <p:nvPr/>
         </p:nvSpPr>
         <p:spPr>
-          <a:xfrm>
-            <a:off x="384048" y="6053328"/>
-            <a:ext cx="7818120" cy="220133"/>
+          <a:gradFill rotWithShape="1">
+            <a:gsLst>
+              <a:gs pos="0">
+                <a:srgbClr val="16B9B0"/>
+              </a:gs>
+              <a:gs pos="42000">
+                <a:srgbClr val="F5C66A"/>
+              </a:gs>
+              <a:gs pos="72000">
+                <a:srgbClr val="6D7BF7"/>
+              </a:gs>
+              <a:gs pos="100000">
+                <a:srgbClr val="16B9B0"/>
+              </a:gs>
+            </a:gsLst>
+            <a:lin ang="2700000" scaled="1"/>
+          </a:gradFill>
+          <a:xfrm>
+            <a:off x="8266175" y="6245352"/>
+            <a:ext cx="768096" cy="576072"/>
+          </a:xfrm>
+          <a:prstGeom prst="roundRect">
+            <a:avLst/>
+          </a:prstGeom>
+          <a:ln w="13970">
+            <a:solidFill>
+              <a:srgbClr val="FFFFFF"/>
+            </a:solidFill>
+          </a:ln>
+        </p:spPr>
+        <p:style>
+          <a:lnRef idx="1">
+            <a:schemeClr val="accent1"/>
+          </a:lnRef>
+          <a:fillRef idx="3">
+            <a:schemeClr val="accent1"/>
+          </a:fillRef>
+          <a:effectRef idx="2">
+            <a:schemeClr val="accent1"/>
+          </a:effectRef>
+          <a:fontRef idx="minor">
+            <a:schemeClr val="lt1"/>
+          </a:fontRef>
+        </p:style>
+        <p:txBody>
+          <a:bodyPr rtlCol="0" anchor="ctr"/>
+          <a:lstStyle/>
+          <a:p>
+            <a:pPr algn="ctr"/>
+          </a:p>
+        </p:txBody>
+      </p:sp>
+      <p:sp>
+        <p:nvSpPr>
+          <p:cNvPr id="24" name="Rounded Rectangle 23"/>
+          <p:cNvSpPr/>
+          <p:nvPr/>
+        </p:nvSpPr>
+        <p:spPr>
+          <a:xfrm>
+            <a:off x="8289036" y="6268212"/>
+            <a:ext cx="722375" cy="530352"/>
+          </a:xfrm>
+          <a:prstGeom prst="roundRect">
+            <a:avLst/>
+          </a:prstGeom>
+          <a:solidFill>
+            <a:srgbClr val="F8FAFC"/>
+          </a:solidFill>
+          <a:ln w="10160">
+            <a:solidFill>
+              <a:srgbClr val="FFFFFF"/>
+            </a:solidFill>
+          </a:ln>
+        </p:spPr>
+        <p:style>
+          <a:lnRef idx="1">
+            <a:schemeClr val="accent1"/>
+          </a:lnRef>
+          <a:fillRef idx="3">
+            <a:schemeClr val="accent1"/>
+          </a:fillRef>
+          <a:effectRef idx="2">
+            <a:schemeClr val="accent1"/>
+          </a:effectRef>
+          <a:fontRef idx="minor">
+            <a:schemeClr val="lt1"/>
+          </a:fontRef>
+        </p:style>
+        <p:txBody>
+          <a:bodyPr rtlCol="0" anchor="ctr"/>
+          <a:lstStyle/>
+          <a:p>
+            <a:pPr algn="ctr"/>
+          </a:p>
+        </p:txBody>
+      </p:sp>
+      <p:pic>
+        <p:nvPicPr>
+          <p:cNvPr id="25" name="Picture 24" descr="image.jpg"/>
+          <p:cNvPicPr>
+            <a:picLocks noChangeAspect="1"/>
+          </p:cNvPicPr>
+          <p:nvPr/>
+        </p:nvPicPr>
+        <p:blipFill>
+          <a:blip r:embed="rId5"/>
+          <a:stretch>
+            <a:fillRect/>
+          </a:stretch>
+        </p:blipFill>
+        <p:spPr>
+          <a:xfrm>
+            <a:off x="8321040" y="6286500"/>
+            <a:ext cx="658368" cy="493776"/>
           </a:xfrm>
           <a:prstGeom prst="rect">
             <a:avLst/>
           </a:prstGeom>
-          <a:noFill/>
-          <a:ln/>
-        </p:spPr>
-        <p:txBody>
-          <a:bodyPr wrap="square" anchor="t" lIns="25400" rIns="25400" tIns="25400" bIns="25400">
-            <a:spAutoFit/>
-          </a:bodyPr>
-          <a:lstStyle/>
-          <a:p>
-            <a:pPr algn="l">
-              <a:lnSpc>
-                <a:spcPct val="100000"/>
-              </a:lnSpc>
-              <a:spcBef>
-                <a:spcPts val="0"/>
-              </a:spcBef>
-              <a:spcAft>
-                <a:spcPts val="0"/>
-              </a:spcAft>
-            </a:pPr>
-            <a:r>
-              <a:rPr sz="760" b="1" i="0">
-                <a:solidFill>
-                  <a:srgbClr val="64748B"/>
-                </a:solidFill>
-                <a:latin typeface="Calibri"/>
-              </a:rPr>
-              <a:t>Fuente: </a:t>
-            </a:r>
-            <a:r>
-              <a:rPr sz="760" b="0" i="0">
-                <a:solidFill>
-                  <a:srgbClr val="64748B"/>
-                </a:solidFill>
-                <a:latin typeface="Calibri"/>
-              </a:rPr>
-              <a:t>Catálogo digital UCB Santa Cruz · Catálogo UPDS · referencias registradas por tema  ·  as of 6 de octubre de 2026</a:t>
-            </a:r>
-          </a:p>
-        </p:txBody>
-      </p:sp>
+        </p:spPr>
+      </p:pic>
     </p:spTree>
   </p:cSld>
   <p:clrMapOvr>

--- a/materiales/actividad-1/tema-04-modelo-datos-v4.pptx
+++ b/materiales/actividad-1/tema-04-modelo-datos-v4.pptx
@@ -12979,134 +12979,6 @@
           </a:p>
         </p:txBody>
       </p:sp>
-      <p:sp>
-        <p:nvSpPr>
-          <p:cNvPr id="21" name="Rounded Rectangle 20"/>
-          <p:cNvSpPr/>
-          <p:nvPr/>
-        </p:nvSpPr>
-        <p:spPr>
-          <a:gradFill rotWithShape="1">
-            <a:gsLst>
-              <a:gs pos="0">
-                <a:srgbClr val="16B9B0"/>
-              </a:gs>
-              <a:gs pos="42000">
-                <a:srgbClr val="F5C66A"/>
-              </a:gs>
-              <a:gs pos="72000">
-                <a:srgbClr val="6D7BF7"/>
-              </a:gs>
-              <a:gs pos="100000">
-                <a:srgbClr val="16B9B0"/>
-              </a:gs>
-            </a:gsLst>
-            <a:lin ang="2700000" scaled="1"/>
-          </a:gradFill>
-          <a:xfrm>
-            <a:off x="8266175" y="6245352"/>
-            <a:ext cx="768096" cy="576072"/>
-          </a:xfrm>
-          <a:prstGeom prst="roundRect">
-            <a:avLst/>
-          </a:prstGeom>
-          <a:ln w="13970">
-            <a:solidFill>
-              <a:srgbClr val="FFFFFF"/>
-            </a:solidFill>
-          </a:ln>
-        </p:spPr>
-        <p:style>
-          <a:lnRef idx="1">
-            <a:schemeClr val="accent1"/>
-          </a:lnRef>
-          <a:fillRef idx="3">
-            <a:schemeClr val="accent1"/>
-          </a:fillRef>
-          <a:effectRef idx="2">
-            <a:schemeClr val="accent1"/>
-          </a:effectRef>
-          <a:fontRef idx="minor">
-            <a:schemeClr val="lt1"/>
-          </a:fontRef>
-        </p:style>
-        <p:txBody>
-          <a:bodyPr rtlCol="0" anchor="ctr"/>
-          <a:lstStyle/>
-          <a:p>
-            <a:pPr algn="ctr"/>
-          </a:p>
-        </p:txBody>
-      </p:sp>
-      <p:sp>
-        <p:nvSpPr>
-          <p:cNvPr id="22" name="Rounded Rectangle 21"/>
-          <p:cNvSpPr/>
-          <p:nvPr/>
-        </p:nvSpPr>
-        <p:spPr>
-          <a:xfrm>
-            <a:off x="8289036" y="6268212"/>
-            <a:ext cx="722375" cy="530352"/>
-          </a:xfrm>
-          <a:prstGeom prst="roundRect">
-            <a:avLst/>
-          </a:prstGeom>
-          <a:solidFill>
-            <a:srgbClr val="F8FAFC"/>
-          </a:solidFill>
-          <a:ln w="10160">
-            <a:solidFill>
-              <a:srgbClr val="FFFFFF"/>
-            </a:solidFill>
-          </a:ln>
-        </p:spPr>
-        <p:style>
-          <a:lnRef idx="1">
-            <a:schemeClr val="accent1"/>
-          </a:lnRef>
-          <a:fillRef idx="3">
-            <a:schemeClr val="accent1"/>
-          </a:fillRef>
-          <a:effectRef idx="2">
-            <a:schemeClr val="accent1"/>
-          </a:effectRef>
-          <a:fontRef idx="minor">
-            <a:schemeClr val="lt1"/>
-          </a:fontRef>
-        </p:style>
-        <p:txBody>
-          <a:bodyPr rtlCol="0" anchor="ctr"/>
-          <a:lstStyle/>
-          <a:p>
-            <a:pPr algn="ctr"/>
-          </a:p>
-        </p:txBody>
-      </p:sp>
-      <p:pic>
-        <p:nvPicPr>
-          <p:cNvPr id="23" name="Picture 22" descr="image.jpg"/>
-          <p:cNvPicPr>
-            <a:picLocks noChangeAspect="1"/>
-          </p:cNvPicPr>
-          <p:nvPr/>
-        </p:nvPicPr>
-        <p:blipFill>
-          <a:blip r:embed="rId2"/>
-          <a:stretch>
-            <a:fillRect/>
-          </a:stretch>
-        </p:blipFill>
-        <p:spPr>
-          <a:xfrm>
-            <a:off x="8321040" y="6286500"/>
-            <a:ext cx="658368" cy="493776"/>
-          </a:xfrm>
-          <a:prstGeom prst="rect">
-            <a:avLst/>
-          </a:prstGeom>
-        </p:spPr>
-      </p:pic>
     </p:spTree>
   </p:cSld>
   <p:clrMapOvr>
@@ -14021,134 +13893,6 @@
           </a:p>
         </p:txBody>
       </p:sp>
-      <p:sp>
-        <p:nvSpPr>
-          <p:cNvPr id="22" name="Rounded Rectangle 21"/>
-          <p:cNvSpPr/>
-          <p:nvPr/>
-        </p:nvSpPr>
-        <p:spPr>
-          <a:gradFill rotWithShape="1">
-            <a:gsLst>
-              <a:gs pos="0">
-                <a:srgbClr val="16B9B0"/>
-              </a:gs>
-              <a:gs pos="42000">
-                <a:srgbClr val="F5C66A"/>
-              </a:gs>
-              <a:gs pos="72000">
-                <a:srgbClr val="6D7BF7"/>
-              </a:gs>
-              <a:gs pos="100000">
-                <a:srgbClr val="16B9B0"/>
-              </a:gs>
-            </a:gsLst>
-            <a:lin ang="2700000" scaled="1"/>
-          </a:gradFill>
-          <a:xfrm>
-            <a:off x="8266175" y="6245352"/>
-            <a:ext cx="768096" cy="576072"/>
-          </a:xfrm>
-          <a:prstGeom prst="roundRect">
-            <a:avLst/>
-          </a:prstGeom>
-          <a:ln w="13970">
-            <a:solidFill>
-              <a:srgbClr val="FFFFFF"/>
-            </a:solidFill>
-          </a:ln>
-        </p:spPr>
-        <p:style>
-          <a:lnRef idx="1">
-            <a:schemeClr val="accent1"/>
-          </a:lnRef>
-          <a:fillRef idx="3">
-            <a:schemeClr val="accent1"/>
-          </a:fillRef>
-          <a:effectRef idx="2">
-            <a:schemeClr val="accent1"/>
-          </a:effectRef>
-          <a:fontRef idx="minor">
-            <a:schemeClr val="lt1"/>
-          </a:fontRef>
-        </p:style>
-        <p:txBody>
-          <a:bodyPr rtlCol="0" anchor="ctr"/>
-          <a:lstStyle/>
-          <a:p>
-            <a:pPr algn="ctr"/>
-          </a:p>
-        </p:txBody>
-      </p:sp>
-      <p:sp>
-        <p:nvSpPr>
-          <p:cNvPr id="23" name="Rounded Rectangle 22"/>
-          <p:cNvSpPr/>
-          <p:nvPr/>
-        </p:nvSpPr>
-        <p:spPr>
-          <a:xfrm>
-            <a:off x="8289036" y="6268212"/>
-            <a:ext cx="722375" cy="530352"/>
-          </a:xfrm>
-          <a:prstGeom prst="roundRect">
-            <a:avLst/>
-          </a:prstGeom>
-          <a:solidFill>
-            <a:srgbClr val="F8FAFC"/>
-          </a:solidFill>
-          <a:ln w="10160">
-            <a:solidFill>
-              <a:srgbClr val="FFFFFF"/>
-            </a:solidFill>
-          </a:ln>
-        </p:spPr>
-        <p:style>
-          <a:lnRef idx="1">
-            <a:schemeClr val="accent1"/>
-          </a:lnRef>
-          <a:fillRef idx="3">
-            <a:schemeClr val="accent1"/>
-          </a:fillRef>
-          <a:effectRef idx="2">
-            <a:schemeClr val="accent1"/>
-          </a:effectRef>
-          <a:fontRef idx="minor">
-            <a:schemeClr val="lt1"/>
-          </a:fontRef>
-        </p:style>
-        <p:txBody>
-          <a:bodyPr rtlCol="0" anchor="ctr"/>
-          <a:lstStyle/>
-          <a:p>
-            <a:pPr algn="ctr"/>
-          </a:p>
-        </p:txBody>
-      </p:sp>
-      <p:pic>
-        <p:nvPicPr>
-          <p:cNvPr id="24" name="Picture 23" descr="image.jpg"/>
-          <p:cNvPicPr>
-            <a:picLocks noChangeAspect="1"/>
-          </p:cNvPicPr>
-          <p:nvPr/>
-        </p:nvPicPr>
-        <p:blipFill>
-          <a:blip r:embed="rId2"/>
-          <a:stretch>
-            <a:fillRect/>
-          </a:stretch>
-        </p:blipFill>
-        <p:spPr>
-          <a:xfrm>
-            <a:off x="8321040" y="6286500"/>
-            <a:ext cx="658368" cy="493776"/>
-          </a:xfrm>
-          <a:prstGeom prst="rect">
-            <a:avLst/>
-          </a:prstGeom>
-        </p:spPr>
-      </p:pic>
     </p:spTree>
   </p:cSld>
   <p:clrMapOvr>
@@ -15642,134 +15386,6 @@
           </a:p>
         </p:txBody>
       </p:sp>
-      <p:sp>
-        <p:nvSpPr>
-          <p:cNvPr id="38" name="Rounded Rectangle 37"/>
-          <p:cNvSpPr/>
-          <p:nvPr/>
-        </p:nvSpPr>
-        <p:spPr>
-          <a:gradFill rotWithShape="1">
-            <a:gsLst>
-              <a:gs pos="0">
-                <a:srgbClr val="16B9B0"/>
-              </a:gs>
-              <a:gs pos="42000">
-                <a:srgbClr val="F5C66A"/>
-              </a:gs>
-              <a:gs pos="72000">
-                <a:srgbClr val="6D7BF7"/>
-              </a:gs>
-              <a:gs pos="100000">
-                <a:srgbClr val="16B9B0"/>
-              </a:gs>
-            </a:gsLst>
-            <a:lin ang="2700000" scaled="1"/>
-          </a:gradFill>
-          <a:xfrm>
-            <a:off x="8266175" y="6245352"/>
-            <a:ext cx="768096" cy="576072"/>
-          </a:xfrm>
-          <a:prstGeom prst="roundRect">
-            <a:avLst/>
-          </a:prstGeom>
-          <a:ln w="13970">
-            <a:solidFill>
-              <a:srgbClr val="FFFFFF"/>
-            </a:solidFill>
-          </a:ln>
-        </p:spPr>
-        <p:style>
-          <a:lnRef idx="1">
-            <a:schemeClr val="accent1"/>
-          </a:lnRef>
-          <a:fillRef idx="3">
-            <a:schemeClr val="accent1"/>
-          </a:fillRef>
-          <a:effectRef idx="2">
-            <a:schemeClr val="accent1"/>
-          </a:effectRef>
-          <a:fontRef idx="minor">
-            <a:schemeClr val="lt1"/>
-          </a:fontRef>
-        </p:style>
-        <p:txBody>
-          <a:bodyPr rtlCol="0" anchor="ctr"/>
-          <a:lstStyle/>
-          <a:p>
-            <a:pPr algn="ctr"/>
-          </a:p>
-        </p:txBody>
-      </p:sp>
-      <p:sp>
-        <p:nvSpPr>
-          <p:cNvPr id="39" name="Rounded Rectangle 38"/>
-          <p:cNvSpPr/>
-          <p:nvPr/>
-        </p:nvSpPr>
-        <p:spPr>
-          <a:xfrm>
-            <a:off x="8289036" y="6268212"/>
-            <a:ext cx="722375" cy="530352"/>
-          </a:xfrm>
-          <a:prstGeom prst="roundRect">
-            <a:avLst/>
-          </a:prstGeom>
-          <a:solidFill>
-            <a:srgbClr val="F8FAFC"/>
-          </a:solidFill>
-          <a:ln w="10160">
-            <a:solidFill>
-              <a:srgbClr val="FFFFFF"/>
-            </a:solidFill>
-          </a:ln>
-        </p:spPr>
-        <p:style>
-          <a:lnRef idx="1">
-            <a:schemeClr val="accent1"/>
-          </a:lnRef>
-          <a:fillRef idx="3">
-            <a:schemeClr val="accent1"/>
-          </a:fillRef>
-          <a:effectRef idx="2">
-            <a:schemeClr val="accent1"/>
-          </a:effectRef>
-          <a:fontRef idx="minor">
-            <a:schemeClr val="lt1"/>
-          </a:fontRef>
-        </p:style>
-        <p:txBody>
-          <a:bodyPr rtlCol="0" anchor="ctr"/>
-          <a:lstStyle/>
-          <a:p>
-            <a:pPr algn="ctr"/>
-          </a:p>
-        </p:txBody>
-      </p:sp>
-      <p:pic>
-        <p:nvPicPr>
-          <p:cNvPr id="40" name="Picture 39" descr="image.jpg"/>
-          <p:cNvPicPr>
-            <a:picLocks noChangeAspect="1"/>
-          </p:cNvPicPr>
-          <p:nvPr/>
-        </p:nvPicPr>
-        <p:blipFill>
-          <a:blip r:embed="rId2"/>
-          <a:stretch>
-            <a:fillRect/>
-          </a:stretch>
-        </p:blipFill>
-        <p:spPr>
-          <a:xfrm>
-            <a:off x="8321040" y="6286500"/>
-            <a:ext cx="658368" cy="493776"/>
-          </a:xfrm>
-          <a:prstGeom prst="rect">
-            <a:avLst/>
-          </a:prstGeom>
-        </p:spPr>
-      </p:pic>
     </p:spTree>
   </p:cSld>
   <p:clrMapOvr>
@@ -16591,134 +16207,6 @@
           </a:p>
         </p:txBody>
       </p:sp>
-      <p:sp>
-        <p:nvSpPr>
-          <p:cNvPr id="22" name="Rounded Rectangle 21"/>
-          <p:cNvSpPr/>
-          <p:nvPr/>
-        </p:nvSpPr>
-        <p:spPr>
-          <a:gradFill rotWithShape="1">
-            <a:gsLst>
-              <a:gs pos="0">
-                <a:srgbClr val="16B9B0"/>
-              </a:gs>
-              <a:gs pos="42000">
-                <a:srgbClr val="F5C66A"/>
-              </a:gs>
-              <a:gs pos="72000">
-                <a:srgbClr val="6D7BF7"/>
-              </a:gs>
-              <a:gs pos="100000">
-                <a:srgbClr val="16B9B0"/>
-              </a:gs>
-            </a:gsLst>
-            <a:lin ang="2700000" scaled="1"/>
-          </a:gradFill>
-          <a:xfrm>
-            <a:off x="8266175" y="6245352"/>
-            <a:ext cx="768096" cy="576072"/>
-          </a:xfrm>
-          <a:prstGeom prst="roundRect">
-            <a:avLst/>
-          </a:prstGeom>
-          <a:ln w="13970">
-            <a:solidFill>
-              <a:srgbClr val="FFFFFF"/>
-            </a:solidFill>
-          </a:ln>
-        </p:spPr>
-        <p:style>
-          <a:lnRef idx="1">
-            <a:schemeClr val="accent1"/>
-          </a:lnRef>
-          <a:fillRef idx="3">
-            <a:schemeClr val="accent1"/>
-          </a:fillRef>
-          <a:effectRef idx="2">
-            <a:schemeClr val="accent1"/>
-          </a:effectRef>
-          <a:fontRef idx="minor">
-            <a:schemeClr val="lt1"/>
-          </a:fontRef>
-        </p:style>
-        <p:txBody>
-          <a:bodyPr rtlCol="0" anchor="ctr"/>
-          <a:lstStyle/>
-          <a:p>
-            <a:pPr algn="ctr"/>
-          </a:p>
-        </p:txBody>
-      </p:sp>
-      <p:sp>
-        <p:nvSpPr>
-          <p:cNvPr id="23" name="Rounded Rectangle 22"/>
-          <p:cNvSpPr/>
-          <p:nvPr/>
-        </p:nvSpPr>
-        <p:spPr>
-          <a:xfrm>
-            <a:off x="8289036" y="6268212"/>
-            <a:ext cx="722375" cy="530352"/>
-          </a:xfrm>
-          <a:prstGeom prst="roundRect">
-            <a:avLst/>
-          </a:prstGeom>
-          <a:solidFill>
-            <a:srgbClr val="F8FAFC"/>
-          </a:solidFill>
-          <a:ln w="10160">
-            <a:solidFill>
-              <a:srgbClr val="FFFFFF"/>
-            </a:solidFill>
-          </a:ln>
-        </p:spPr>
-        <p:style>
-          <a:lnRef idx="1">
-            <a:schemeClr val="accent1"/>
-          </a:lnRef>
-          <a:fillRef idx="3">
-            <a:schemeClr val="accent1"/>
-          </a:fillRef>
-          <a:effectRef idx="2">
-            <a:schemeClr val="accent1"/>
-          </a:effectRef>
-          <a:fontRef idx="minor">
-            <a:schemeClr val="lt1"/>
-          </a:fontRef>
-        </p:style>
-        <p:txBody>
-          <a:bodyPr rtlCol="0" anchor="ctr"/>
-          <a:lstStyle/>
-          <a:p>
-            <a:pPr algn="ctr"/>
-          </a:p>
-        </p:txBody>
-      </p:sp>
-      <p:pic>
-        <p:nvPicPr>
-          <p:cNvPr id="24" name="Picture 23" descr="image.jpg"/>
-          <p:cNvPicPr>
-            <a:picLocks noChangeAspect="1"/>
-          </p:cNvPicPr>
-          <p:nvPr/>
-        </p:nvPicPr>
-        <p:blipFill>
-          <a:blip r:embed="rId2"/>
-          <a:stretch>
-            <a:fillRect/>
-          </a:stretch>
-        </p:blipFill>
-        <p:spPr>
-          <a:xfrm>
-            <a:off x="8321040" y="6286500"/>
-            <a:ext cx="658368" cy="493776"/>
-          </a:xfrm>
-          <a:prstGeom prst="rect">
-            <a:avLst/>
-          </a:prstGeom>
-        </p:spPr>
-      </p:pic>
     </p:spTree>
   </p:cSld>
   <p:clrMapOvr>
@@ -17411,134 +16899,6 @@
           </a:p>
         </p:txBody>
       </p:sp>
-      <p:sp>
-        <p:nvSpPr>
-          <p:cNvPr id="17" name="Rounded Rectangle 16"/>
-          <p:cNvSpPr/>
-          <p:nvPr/>
-        </p:nvSpPr>
-        <p:spPr>
-          <a:gradFill rotWithShape="1">
-            <a:gsLst>
-              <a:gs pos="0">
-                <a:srgbClr val="16B9B0"/>
-              </a:gs>
-              <a:gs pos="42000">
-                <a:srgbClr val="F5C66A"/>
-              </a:gs>
-              <a:gs pos="72000">
-                <a:srgbClr val="6D7BF7"/>
-              </a:gs>
-              <a:gs pos="100000">
-                <a:srgbClr val="16B9B0"/>
-              </a:gs>
-            </a:gsLst>
-            <a:lin ang="2700000" scaled="1"/>
-          </a:gradFill>
-          <a:xfrm>
-            <a:off x="8266175" y="6245352"/>
-            <a:ext cx="768096" cy="576072"/>
-          </a:xfrm>
-          <a:prstGeom prst="roundRect">
-            <a:avLst/>
-          </a:prstGeom>
-          <a:ln w="13970">
-            <a:solidFill>
-              <a:srgbClr val="FFFFFF"/>
-            </a:solidFill>
-          </a:ln>
-        </p:spPr>
-        <p:style>
-          <a:lnRef idx="1">
-            <a:schemeClr val="accent1"/>
-          </a:lnRef>
-          <a:fillRef idx="3">
-            <a:schemeClr val="accent1"/>
-          </a:fillRef>
-          <a:effectRef idx="2">
-            <a:schemeClr val="accent1"/>
-          </a:effectRef>
-          <a:fontRef idx="minor">
-            <a:schemeClr val="lt1"/>
-          </a:fontRef>
-        </p:style>
-        <p:txBody>
-          <a:bodyPr rtlCol="0" anchor="ctr"/>
-          <a:lstStyle/>
-          <a:p>
-            <a:pPr algn="ctr"/>
-          </a:p>
-        </p:txBody>
-      </p:sp>
-      <p:sp>
-        <p:nvSpPr>
-          <p:cNvPr id="18" name="Rounded Rectangle 17"/>
-          <p:cNvSpPr/>
-          <p:nvPr/>
-        </p:nvSpPr>
-        <p:spPr>
-          <a:xfrm>
-            <a:off x="8289036" y="6268212"/>
-            <a:ext cx="722375" cy="530352"/>
-          </a:xfrm>
-          <a:prstGeom prst="roundRect">
-            <a:avLst/>
-          </a:prstGeom>
-          <a:solidFill>
-            <a:srgbClr val="F8FAFC"/>
-          </a:solidFill>
-          <a:ln w="10160">
-            <a:solidFill>
-              <a:srgbClr val="FFFFFF"/>
-            </a:solidFill>
-          </a:ln>
-        </p:spPr>
-        <p:style>
-          <a:lnRef idx="1">
-            <a:schemeClr val="accent1"/>
-          </a:lnRef>
-          <a:fillRef idx="3">
-            <a:schemeClr val="accent1"/>
-          </a:fillRef>
-          <a:effectRef idx="2">
-            <a:schemeClr val="accent1"/>
-          </a:effectRef>
-          <a:fontRef idx="minor">
-            <a:schemeClr val="lt1"/>
-          </a:fontRef>
-        </p:style>
-        <p:txBody>
-          <a:bodyPr rtlCol="0" anchor="ctr"/>
-          <a:lstStyle/>
-          <a:p>
-            <a:pPr algn="ctr"/>
-          </a:p>
-        </p:txBody>
-      </p:sp>
-      <p:pic>
-        <p:nvPicPr>
-          <p:cNvPr id="19" name="Picture 18" descr="image.jpg"/>
-          <p:cNvPicPr>
-            <a:picLocks noChangeAspect="1"/>
-          </p:cNvPicPr>
-          <p:nvPr/>
-        </p:nvPicPr>
-        <p:blipFill>
-          <a:blip r:embed="rId2"/>
-          <a:stretch>
-            <a:fillRect/>
-          </a:stretch>
-        </p:blipFill>
-        <p:spPr>
-          <a:xfrm>
-            <a:off x="8321040" y="6286500"/>
-            <a:ext cx="658368" cy="493776"/>
-          </a:xfrm>
-          <a:prstGeom prst="rect">
-            <a:avLst/>
-          </a:prstGeom>
-        </p:spPr>
-      </p:pic>
     </p:spTree>
   </p:cSld>
   <p:clrMapOvr>
@@ -18588,134 +17948,6 @@
           </a:p>
         </p:txBody>
       </p:sp>
-      <p:sp>
-        <p:nvSpPr>
-          <p:cNvPr id="25" name="Rounded Rectangle 24"/>
-          <p:cNvSpPr/>
-          <p:nvPr/>
-        </p:nvSpPr>
-        <p:spPr>
-          <a:gradFill rotWithShape="1">
-            <a:gsLst>
-              <a:gs pos="0">
-                <a:srgbClr val="16B9B0"/>
-              </a:gs>
-              <a:gs pos="42000">
-                <a:srgbClr val="F5C66A"/>
-              </a:gs>
-              <a:gs pos="72000">
-                <a:srgbClr val="6D7BF7"/>
-              </a:gs>
-              <a:gs pos="100000">
-                <a:srgbClr val="16B9B0"/>
-              </a:gs>
-            </a:gsLst>
-            <a:lin ang="2700000" scaled="1"/>
-          </a:gradFill>
-          <a:xfrm>
-            <a:off x="8266175" y="6245352"/>
-            <a:ext cx="768096" cy="576072"/>
-          </a:xfrm>
-          <a:prstGeom prst="roundRect">
-            <a:avLst/>
-          </a:prstGeom>
-          <a:ln w="13970">
-            <a:solidFill>
-              <a:srgbClr val="FFFFFF"/>
-            </a:solidFill>
-          </a:ln>
-        </p:spPr>
-        <p:style>
-          <a:lnRef idx="1">
-            <a:schemeClr val="accent1"/>
-          </a:lnRef>
-          <a:fillRef idx="3">
-            <a:schemeClr val="accent1"/>
-          </a:fillRef>
-          <a:effectRef idx="2">
-            <a:schemeClr val="accent1"/>
-          </a:effectRef>
-          <a:fontRef idx="minor">
-            <a:schemeClr val="lt1"/>
-          </a:fontRef>
-        </p:style>
-        <p:txBody>
-          <a:bodyPr rtlCol="0" anchor="ctr"/>
-          <a:lstStyle/>
-          <a:p>
-            <a:pPr algn="ctr"/>
-          </a:p>
-        </p:txBody>
-      </p:sp>
-      <p:sp>
-        <p:nvSpPr>
-          <p:cNvPr id="26" name="Rounded Rectangle 25"/>
-          <p:cNvSpPr/>
-          <p:nvPr/>
-        </p:nvSpPr>
-        <p:spPr>
-          <a:xfrm>
-            <a:off x="8289036" y="6268212"/>
-            <a:ext cx="722375" cy="530352"/>
-          </a:xfrm>
-          <a:prstGeom prst="roundRect">
-            <a:avLst/>
-          </a:prstGeom>
-          <a:solidFill>
-            <a:srgbClr val="F8FAFC"/>
-          </a:solidFill>
-          <a:ln w="10160">
-            <a:solidFill>
-              <a:srgbClr val="FFFFFF"/>
-            </a:solidFill>
-          </a:ln>
-        </p:spPr>
-        <p:style>
-          <a:lnRef idx="1">
-            <a:schemeClr val="accent1"/>
-          </a:lnRef>
-          <a:fillRef idx="3">
-            <a:schemeClr val="accent1"/>
-          </a:fillRef>
-          <a:effectRef idx="2">
-            <a:schemeClr val="accent1"/>
-          </a:effectRef>
-          <a:fontRef idx="minor">
-            <a:schemeClr val="lt1"/>
-          </a:fontRef>
-        </p:style>
-        <p:txBody>
-          <a:bodyPr rtlCol="0" anchor="ctr"/>
-          <a:lstStyle/>
-          <a:p>
-            <a:pPr algn="ctr"/>
-          </a:p>
-        </p:txBody>
-      </p:sp>
-      <p:pic>
-        <p:nvPicPr>
-          <p:cNvPr id="27" name="Picture 26" descr="image.jpg"/>
-          <p:cNvPicPr>
-            <a:picLocks noChangeAspect="1"/>
-          </p:cNvPicPr>
-          <p:nvPr/>
-        </p:nvPicPr>
-        <p:blipFill>
-          <a:blip r:embed="rId3"/>
-          <a:stretch>
-            <a:fillRect/>
-          </a:stretch>
-        </p:blipFill>
-        <p:spPr>
-          <a:xfrm>
-            <a:off x="8321040" y="6286500"/>
-            <a:ext cx="658368" cy="493776"/>
-          </a:xfrm>
-          <a:prstGeom prst="rect">
-            <a:avLst/>
-          </a:prstGeom>
-        </p:spPr>
-      </p:pic>
     </p:spTree>
   </p:cSld>
   <p:clrMapOvr>
@@ -19389,7 +18621,7 @@
         <p:spPr>
           <a:xfrm>
             <a:off x="749808" y="4059936"/>
-            <a:ext cx="7589520" cy="182880"/>
+            <a:ext cx="6400800" cy="182880"/>
           </a:xfrm>
           <a:prstGeom prst="rect">
             <a:avLst/>
@@ -19435,7 +18667,7 @@
         <p:spPr>
           <a:xfrm>
             <a:off x="749808" y="4306824"/>
-            <a:ext cx="7543800" cy="292608"/>
+            <a:ext cx="6355080" cy="292608"/>
           </a:xfrm>
           <a:prstGeom prst="rect">
             <a:avLst/>
@@ -19467,7 +18699,7 @@
                 </a:solidFill>
                 <a:latin typeface="Calibri"/>
               </a:rPr>
-              <a:t>Bases de datos con SQL Server 2012</a:t>
+              <a:t>Fundamentos de bases de datos</a:t>
             </a:r>
           </a:p>
         </p:txBody>
@@ -19481,7 +18713,7 @@
         <p:spPr>
           <a:xfrm>
             <a:off x="749808" y="4654296"/>
-            <a:ext cx="6583680" cy="201168"/>
+            <a:ext cx="6355080" cy="201168"/>
           </a:xfrm>
           <a:prstGeom prst="rect">
             <a:avLst/>
@@ -19513,7 +18745,7 @@
                 </a:solidFill>
                 <a:latin typeface="Calibri"/>
               </a:rPr>
-              <a:t>Maribel Sabana · Megabyte · 2013 · 575 p.</a:t>
+              <a:t>Abraham Silberschatz, Henry F. Korth y S. Sudarshan · McGraw-Hill · 6.ª ed., 2014 · ISBN 978-84-481-9033-0</a:t>
             </a:r>
           </a:p>
         </p:txBody>
@@ -19528,8 +18760,8 @@
         </p:nvSpPr>
         <p:spPr>
           <a:xfrm>
-            <a:off x="6903720" y="4937760"/>
-            <a:ext cx="1417320" cy="164592"/>
+            <a:off x="749808" y="4937760"/>
+            <a:ext cx="2286000" cy="164592"/>
           </a:xfrm>
           <a:prstGeom prst="rect">
             <a:avLst/>
@@ -19568,7 +18800,7 @@
       </p:sp>
       <p:sp>
         <p:nvSpPr>
-          <p:cNvPr id="23" name="Rounded Rectangle 22"/>
+          <p:cNvPr id="22" name="Rounded Rectangle 21"/>
           <p:cNvSpPr/>
           <p:nvPr/>
         </p:nvSpPr>
@@ -19591,8 +18823,8 @@
             <a:lin ang="2700000" scaled="1"/>
           </a:gradFill>
           <a:xfrm>
-            <a:off x="8266175" y="6245352"/>
-            <a:ext cx="768096" cy="576072"/>
+            <a:off x="7370064" y="4005072"/>
+            <a:ext cx="877824" cy="1133856"/>
           </a:xfrm>
           <a:prstGeom prst="roundRect">
             <a:avLst/>
@@ -19627,14 +18859,14 @@
       </p:sp>
       <p:sp>
         <p:nvSpPr>
-          <p:cNvPr id="24" name="Rounded Rectangle 23"/>
+          <p:cNvPr id="23" name="Rounded Rectangle 22"/>
           <p:cNvSpPr/>
           <p:nvPr/>
         </p:nvSpPr>
         <p:spPr>
           <a:xfrm>
-            <a:off x="8289036" y="6268212"/>
-            <a:ext cx="722375" cy="530352"/>
+            <a:off x="7392924" y="4027932"/>
+            <a:ext cx="832103" cy="1088136"/>
           </a:xfrm>
           <a:prstGeom prst="roundRect">
             <a:avLst/>
@@ -19672,22 +18904,22 @@
       </p:sp>
       <p:pic>
         <p:nvPicPr>
-          <p:cNvPr id="25" name="Picture 24" descr="image.jpg"/>
+          <p:cNvPr id="24" name="Picture 23" descr="Portada de Fundamentos de bases de datos, sexta edición."/>
           <p:cNvPicPr>
             <a:picLocks noChangeAspect="1"/>
           </p:cNvPicPr>
           <p:nvPr/>
         </p:nvPicPr>
         <p:blipFill>
-          <a:blip r:embed="rId5"/>
+          <a:blip r:embed="rId6"/>
           <a:stretch>
             <a:fillRect/>
           </a:stretch>
         </p:blipFill>
         <p:spPr>
           <a:xfrm>
-            <a:off x="8321040" y="6286500"/>
-            <a:ext cx="658368" cy="493776"/>
+            <a:off x="7424927" y="4059936"/>
+            <a:ext cx="768096" cy="1024128"/>
           </a:xfrm>
           <a:prstGeom prst="rect">
             <a:avLst/>

--- a/materiales/actividad-1/tema-04-modelo-datos-v4.pptx
+++ b/materiales/actividad-1/tema-04-modelo-datos-v4.pptx
@@ -11525,8 +11525,8 @@
         </p:nvSpPr>
         <p:spPr>
           <a:xfrm>
-            <a:off x="3657600" y="402336"/>
-            <a:ext cx="5074920" cy="219456"/>
+            <a:off x="594360" y="438912"/>
+            <a:ext cx="7955279" cy="237744"/>
           </a:xfrm>
           <a:prstGeom prst="rect">
             <a:avLst/>
@@ -11535,29 +11535,14 @@
           <a:ln/>
         </p:spPr>
         <p:txBody>
-          <a:bodyPr wrap="square" anchor="t" lIns="25400" rIns="25400" tIns="25400" bIns="25400">
+          <a:bodyPr wrap="square" anchor="ctr" lIns="18288" rIns="18288" tIns="9144" bIns="9144">
             <a:spAutoFit/>
           </a:bodyPr>
           <a:lstStyle/>
           <a:p>
-            <a:pPr algn="l">
-              <a:lnSpc>
-                <a:spcPct val="100000"/>
-              </a:lnSpc>
-              <a:spcBef>
-                <a:spcPts val="0"/>
-              </a:spcBef>
-              <a:spcAft>
-                <a:spcPts val="0"/>
-              </a:spcAft>
-            </a:pPr>
+            <a:pPr algn="l"/>
             <a:r>
-              <a:rPr sz="1050" b="1" i="0">
-                <a:solidFill>
-                  <a:srgbClr val="0075A9"/>
-                </a:solidFill>
-                <a:latin typeface="Calibri"/>
-              </a:rPr>
+              <a:rPr sz="1300" b="1"/>
               <a:t>ACTIVIDAD 1 · TEMA 04</a:t>
             </a:r>
           </a:p>
@@ -11571,8 +11556,8 @@
         </p:nvSpPr>
         <p:spPr>
           <a:xfrm>
-            <a:off x="3657600" y="713232"/>
-            <a:ext cx="5074920" cy="850392"/>
+            <a:off x="594360" y="749808"/>
+            <a:ext cx="7955279" cy="658368"/>
           </a:xfrm>
           <a:prstGeom prst="rect">
             <a:avLst/>
@@ -11581,7 +11566,7 @@
           <a:ln/>
         </p:spPr>
         <p:txBody>
-          <a:bodyPr wrap="square" anchor="t" lIns="25400" rIns="25400" tIns="25400" bIns="25400">
+          <a:bodyPr wrap="square" anchor="ctr" lIns="18288" rIns="18288" tIns="9144" bIns="9144">
             <a:spAutoFit/>
           </a:bodyPr>
           <a:lstStyle/>
@@ -11598,7 +11583,7 @@
               </a:spcAft>
             </a:pPr>
             <a:r>
-              <a:rPr sz="2250" b="1" i="0">
+              <a:rPr sz="2900" b="1" i="0">
                 <a:solidFill>
                   <a:srgbClr val="1D4696"/>
                 </a:solidFill>
@@ -11617,8 +11602,8 @@
         </p:nvSpPr>
         <p:spPr>
           <a:xfrm>
-            <a:off x="3675887" y="1618488"/>
-            <a:ext cx="4983480" cy="420624"/>
+            <a:off x="594360" y="1481328"/>
+            <a:ext cx="7955279" cy="347472"/>
           </a:xfrm>
           <a:prstGeom prst="rect">
             <a:avLst/>
@@ -11627,91 +11612,21 @@
           <a:ln/>
         </p:spPr>
         <p:txBody>
-          <a:bodyPr wrap="square" anchor="t" lIns="25400" rIns="25400" tIns="25400" bIns="25400">
+          <a:bodyPr wrap="square" anchor="ctr" lIns="18288" rIns="18288" tIns="9144" bIns="9144">
             <a:spAutoFit/>
           </a:bodyPr>
           <a:lstStyle/>
           <a:p>
-            <a:pPr algn="l">
-              <a:lnSpc>
-                <a:spcPct val="100000"/>
-              </a:lnSpc>
-              <a:spcBef>
-                <a:spcPts val="0"/>
-              </a:spcBef>
-              <a:spcAft>
-                <a:spcPts val="0"/>
-              </a:spcAft>
-            </a:pPr>
+            <a:pPr algn="l"/>
             <a:r>
-              <a:rPr sz="1320" b="1" i="0">
+              <a:rPr sz="1800" b="1">
                 <a:solidFill>
-                  <a:srgbClr val="1E293B"/>
+                  <a:srgbClr val="18488B"/>
                 </a:solidFill>
-                <a:latin typeface="Calibri"/>
               </a:rPr>
-              <a:t>Sistemas de Información I</a:t>
+              <a:t>SISTEMAS DE INFORMACIÓN I</a:t>
             </a:r>
           </a:p>
-        </p:txBody>
-      </p:sp>
-      <p:sp>
-        <p:nvSpPr>
-          <p:cNvPr id="7" name="Rounded Rectangle 6"/>
-          <p:cNvSpPr/>
-          <p:nvPr/>
-        </p:nvSpPr>
-        <p:spPr>
-          <a:xfrm>
-            <a:off x="3703320" y="2148840"/>
-            <a:ext cx="4892040" cy="1353312"/>
-          </a:xfrm>
-          <a:prstGeom prst="roundRect">
-            <a:avLst>
-              <a:gd name="adj" fmla="val 8000"/>
-            </a:avLst>
-          </a:prstGeom>
-          <a:solidFill>
-            <a:srgbClr val="E7F5FA"/>
-          </a:solidFill>
-          <a:ln w="19050">
-            <a:solidFill>
-              <a:srgbClr val="0075A9"/>
-            </a:solidFill>
-          </a:ln>
-          <a:effectLst/>
-        </p:spPr>
-        <p:txBody>
-          <a:bodyPr rtlCol="0" anchor="ctr"/>
-          <a:lstStyle/>
-          <a:p>
-            <a:pPr algn="ctr"/>
-          </a:p>
-        </p:txBody>
-      </p:sp>
-      <p:sp>
-        <p:nvSpPr>
-          <p:cNvPr id="8" name="TextBox 7"/>
-          <p:cNvSpPr txBox="1"/>
-          <p:nvPr/>
-        </p:nvSpPr>
-        <p:spPr>
-          <a:xfrm>
-            <a:off x="3840480" y="2633472"/>
-            <a:ext cx="4617720" cy="310896"/>
-          </a:xfrm>
-          <a:prstGeom prst="rect">
-            <a:avLst/>
-          </a:prstGeom>
-          <a:noFill/>
-          <a:ln/>
-        </p:spPr>
-        <p:txBody>
-          <a:bodyPr wrap="square" anchor="ctr" lIns="25400" rIns="25400" tIns="25400" bIns="25400">
-            <a:spAutoFit/>
-          </a:bodyPr>
-          <a:lstStyle/>
-          <a:p/>
         </p:txBody>
       </p:sp>
       <p:sp>
@@ -11722,8 +11637,8 @@
         </p:nvSpPr>
         <p:spPr>
           <a:xfrm>
-            <a:off x="3703320" y="3630168"/>
-            <a:ext cx="4800600" cy="274320"/>
+            <a:off x="5074920" y="2148840"/>
+            <a:ext cx="3474720" cy="310896"/>
           </a:xfrm>
           <a:prstGeom prst="rect">
             <a:avLst/>
@@ -11732,29 +11647,14 @@
           <a:ln/>
         </p:spPr>
         <p:txBody>
-          <a:bodyPr wrap="square" anchor="t" lIns="25400" rIns="25400" tIns="25400" bIns="25400">
+          <a:bodyPr wrap="square" anchor="ctr" lIns="18288" rIns="18288" tIns="9144" bIns="9144">
             <a:spAutoFit/>
           </a:bodyPr>
           <a:lstStyle/>
           <a:p>
-            <a:pPr algn="l">
-              <a:lnSpc>
-                <a:spcPct val="100000"/>
-              </a:lnSpc>
-              <a:spcBef>
-                <a:spcPts val="0"/>
-              </a:spcBef>
-              <a:spcAft>
-                <a:spcPts val="0"/>
-              </a:spcAft>
-            </a:pPr>
+            <a:pPr algn="l"/>
             <a:r>
-              <a:rPr sz="1000" b="1" i="0">
-                <a:solidFill>
-                  <a:srgbClr val="0075A9"/>
-                </a:solidFill>
-                <a:latin typeface="Calibri"/>
-              </a:rPr>
+              <a:rPr sz="1600" b="1"/>
               <a:t>INTEGRANTES</a:t>
             </a:r>
           </a:p>
@@ -11768,8 +11668,8 @@
         </p:nvSpPr>
         <p:spPr>
           <a:xfrm>
-            <a:off x="3703320" y="3959352"/>
-            <a:ext cx="2286000" cy="164592"/>
+            <a:off x="5074920" y="2633472"/>
+            <a:ext cx="3566160" cy="292608"/>
           </a:xfrm>
           <a:prstGeom prst="rect">
             <a:avLst/>
@@ -11778,7 +11678,7 @@
           <a:ln/>
         </p:spPr>
         <p:txBody>
-          <a:bodyPr wrap="square" anchor="t" lIns="25400" rIns="25400" tIns="25400" bIns="25400">
+          <a:bodyPr wrap="square" anchor="ctr" lIns="18288" rIns="18288" tIns="9144" bIns="9144">
             <a:spAutoFit/>
           </a:bodyPr>
           <a:lstStyle/>
@@ -11795,7 +11695,7 @@
               </a:spcAft>
             </a:pPr>
             <a:r>
-              <a:rPr sz="830" b="1" i="0">
+              <a:rPr sz="1400" b="0" i="0">
                 <a:solidFill>
                   <a:srgbClr val="64748B"/>
                 </a:solidFill>
@@ -11814,8 +11714,8 @@
         </p:nvSpPr>
         <p:spPr>
           <a:xfrm>
-            <a:off x="6190488" y="3959352"/>
-            <a:ext cx="2286000" cy="164592"/>
+            <a:off x="5074920" y="3054096"/>
+            <a:ext cx="3566160" cy="292608"/>
           </a:xfrm>
           <a:prstGeom prst="rect">
             <a:avLst/>
@@ -11824,7 +11724,7 @@
           <a:ln/>
         </p:spPr>
         <p:txBody>
-          <a:bodyPr wrap="square" anchor="t" lIns="25400" rIns="25400" tIns="25400" bIns="25400">
+          <a:bodyPr wrap="square" anchor="ctr" lIns="18288" rIns="18288" tIns="9144" bIns="9144">
             <a:spAutoFit/>
           </a:bodyPr>
           <a:lstStyle/>
@@ -11841,7 +11741,7 @@
               </a:spcAft>
             </a:pPr>
             <a:r>
-              <a:rPr sz="830" b="1" i="0">
+              <a:rPr sz="1400" b="0" i="0">
                 <a:solidFill>
                   <a:srgbClr val="64748B"/>
                 </a:solidFill>
@@ -11860,8 +11760,8 @@
         </p:nvSpPr>
         <p:spPr>
           <a:xfrm>
-            <a:off x="3703320" y="4526280"/>
-            <a:ext cx="2286000" cy="164592"/>
+            <a:off x="5074920" y="3474720"/>
+            <a:ext cx="3566160" cy="292608"/>
           </a:xfrm>
           <a:prstGeom prst="rect">
             <a:avLst/>
@@ -11870,7 +11770,7 @@
           <a:ln/>
         </p:spPr>
         <p:txBody>
-          <a:bodyPr wrap="square" anchor="t" lIns="25400" rIns="25400" tIns="25400" bIns="25400">
+          <a:bodyPr wrap="square" anchor="ctr" lIns="18288" rIns="18288" tIns="9144" bIns="9144">
             <a:spAutoFit/>
           </a:bodyPr>
           <a:lstStyle/>
@@ -11887,7 +11787,7 @@
               </a:spcAft>
             </a:pPr>
             <a:r>
-              <a:rPr sz="830" b="1" i="0">
+              <a:rPr sz="1400" b="0" i="0">
                 <a:solidFill>
                   <a:srgbClr val="64748B"/>
                 </a:solidFill>
@@ -11906,8 +11806,8 @@
         </p:nvSpPr>
         <p:spPr>
           <a:xfrm>
-            <a:off x="6190488" y="4526280"/>
-            <a:ext cx="2286000" cy="164592"/>
+            <a:off x="5074920" y="3895344"/>
+            <a:ext cx="3566160" cy="292608"/>
           </a:xfrm>
           <a:prstGeom prst="rect">
             <a:avLst/>
@@ -11916,7 +11816,7 @@
           <a:ln/>
         </p:spPr>
         <p:txBody>
-          <a:bodyPr wrap="square" anchor="t" lIns="25400" rIns="25400" tIns="25400" bIns="25400">
+          <a:bodyPr wrap="square" anchor="ctr" lIns="18288" rIns="18288" tIns="9144" bIns="9144">
             <a:spAutoFit/>
           </a:bodyPr>
           <a:lstStyle/>
@@ -11933,7 +11833,7 @@
               </a:spcAft>
             </a:pPr>
             <a:r>
-              <a:rPr sz="830" b="1" i="0">
+              <a:rPr sz="1400" b="0" i="0">
                 <a:solidFill>
                   <a:srgbClr val="64748B"/>
                 </a:solidFill>
@@ -11952,8 +11852,8 @@
         </p:nvSpPr>
         <p:spPr>
           <a:xfrm>
-            <a:off x="3703320" y="5093208"/>
-            <a:ext cx="2286000" cy="164592"/>
+            <a:off x="5074920" y="4315968"/>
+            <a:ext cx="3566160" cy="292608"/>
           </a:xfrm>
           <a:prstGeom prst="rect">
             <a:avLst/>
@@ -11962,7 +11862,7 @@
           <a:ln/>
         </p:spPr>
         <p:txBody>
-          <a:bodyPr wrap="square" anchor="t" lIns="25400" rIns="25400" tIns="25400" bIns="25400">
+          <a:bodyPr wrap="square" anchor="ctr" lIns="18288" rIns="18288" tIns="9144" bIns="9144">
             <a:spAutoFit/>
           </a:bodyPr>
           <a:lstStyle/>
@@ -11979,7 +11879,7 @@
               </a:spcAft>
             </a:pPr>
             <a:r>
-              <a:rPr sz="830" b="1" i="0">
+              <a:rPr sz="1400" b="0" i="0">
                 <a:solidFill>
                   <a:srgbClr val="64748B"/>
                 </a:solidFill>
@@ -11998,8 +11898,8 @@
         </p:nvSpPr>
         <p:spPr>
           <a:xfrm>
-            <a:off x="3703320" y="5742432"/>
-            <a:ext cx="4754880" cy="237744"/>
+            <a:off x="594360" y="5650992"/>
+            <a:ext cx="7955279" cy="566928"/>
           </a:xfrm>
           <a:prstGeom prst="rect">
             <a:avLst/>
@@ -12008,141 +11908,26 @@
           <a:ln/>
         </p:spPr>
         <p:txBody>
-          <a:bodyPr wrap="square" anchor="t" lIns="25400" rIns="25400" tIns="25400" bIns="25400">
+          <a:bodyPr wrap="square" anchor="ctr" lIns="18288" rIns="18288" tIns="9144" bIns="9144">
             <a:spAutoFit/>
           </a:bodyPr>
           <a:lstStyle/>
           <a:p>
-            <a:pPr algn="l">
-              <a:lnSpc>
-                <a:spcPct val="100000"/>
-              </a:lnSpc>
-              <a:spcBef>
-                <a:spcPts val="0"/>
-              </a:spcBef>
-              <a:spcAft>
-                <a:spcPts val="0"/>
-              </a:spcAft>
-            </a:pPr>
+            <a:pPr algn="ctr"/>
             <a:r>
-              <a:rPr sz="919" b="0" i="0">
+              <a:rPr sz="2500" b="1">
                 <a:solidFill>
-                  <a:srgbClr val="64748B"/>
+                  <a:srgbClr val="18488B"/>
                 </a:solidFill>
-                <a:latin typeface="Calibri"/>
               </a:rPr>
-              <a:t>Universidad Privada Domingo Savio</a:t>
+              <a:t>UNIVERSIDAD PRIVADA DOMINGO SAVIO</a:t>
             </a:r>
-          </a:p>
-        </p:txBody>
-      </p:sp>
-      <p:sp>
-        <p:nvSpPr>
-          <p:cNvPr id="22" name="Rounded Rectangle 21"/>
-          <p:cNvSpPr/>
-          <p:nvPr/>
-        </p:nvSpPr>
-        <p:spPr>
-          <a:gradFill rotWithShape="1">
-            <a:gsLst>
-              <a:gs pos="0">
-                <a:srgbClr val="16B9B0"/>
-              </a:gs>
-              <a:gs pos="42000">
-                <a:srgbClr val="F5C66A"/>
-              </a:gs>
-              <a:gs pos="72000">
-                <a:srgbClr val="6D7BF7"/>
-              </a:gs>
-              <a:gs pos="100000">
-                <a:srgbClr val="16B9B0"/>
-              </a:gs>
-            </a:gsLst>
-            <a:lin ang="2700000" scaled="1"/>
-          </a:gradFill>
-          <a:xfrm>
-            <a:off x="5230368" y="2084831"/>
-            <a:ext cx="1828800" cy="1426464"/>
-          </a:xfrm>
-          <a:prstGeom prst="roundRect">
-            <a:avLst/>
-          </a:prstGeom>
-          <a:ln w="13970">
-            <a:solidFill>
-              <a:srgbClr val="FFFFFF"/>
-            </a:solidFill>
-          </a:ln>
-        </p:spPr>
-        <p:style>
-          <a:lnRef idx="1">
-            <a:schemeClr val="accent1"/>
-          </a:lnRef>
-          <a:fillRef idx="3">
-            <a:schemeClr val="accent1"/>
-          </a:fillRef>
-          <a:effectRef idx="2">
-            <a:schemeClr val="accent1"/>
-          </a:effectRef>
-          <a:fontRef idx="minor">
-            <a:schemeClr val="lt1"/>
-          </a:fontRef>
-        </p:style>
-        <p:txBody>
-          <a:bodyPr rtlCol="0" anchor="ctr"/>
-          <a:lstStyle/>
-          <a:p>
-            <a:pPr algn="ctr"/>
-          </a:p>
-        </p:txBody>
-      </p:sp>
-      <p:sp>
-        <p:nvSpPr>
-          <p:cNvPr id="23" name="Rounded Rectangle 22"/>
-          <p:cNvSpPr/>
-          <p:nvPr/>
-        </p:nvSpPr>
-        <p:spPr>
-          <a:xfrm>
-            <a:off x="5253228" y="2107692"/>
-            <a:ext cx="1783080" cy="1380744"/>
-          </a:xfrm>
-          <a:prstGeom prst="roundRect">
-            <a:avLst/>
-          </a:prstGeom>
-          <a:solidFill>
-            <a:srgbClr val="F8FAFC"/>
-          </a:solidFill>
-          <a:ln w="10160">
-            <a:solidFill>
-              <a:srgbClr val="FFFFFF"/>
-            </a:solidFill>
-          </a:ln>
-        </p:spPr>
-        <p:style>
-          <a:lnRef idx="1">
-            <a:schemeClr val="accent1"/>
-          </a:lnRef>
-          <a:fillRef idx="3">
-            <a:schemeClr val="accent1"/>
-          </a:fillRef>
-          <a:effectRef idx="2">
-            <a:schemeClr val="accent1"/>
-          </a:effectRef>
-          <a:fontRef idx="minor">
-            <a:schemeClr val="lt1"/>
-          </a:fontRef>
-        </p:style>
-        <p:txBody>
-          <a:bodyPr rtlCol="0" anchor="ctr"/>
-          <a:lstStyle/>
-          <a:p>
-            <a:pPr algn="ctr"/>
           </a:p>
         </p:txBody>
       </p:sp>
       <p:pic>
         <p:nvPicPr>
-          <p:cNvPr id="21" name="Picture 20" descr="foto-grupal.jpeg"/>
+          <p:cNvPr id="21" name="Foto grupal · orientación corregida" descr="image.jpg"/>
           <p:cNvPicPr>
             <a:picLocks noChangeAspect="1"/>
           </p:cNvPicPr>
@@ -12155,9 +11940,9 @@
           </a:stretch>
         </p:blipFill>
         <p:spPr>
-          <a:xfrm>
-            <a:off x="5340096" y="2139696"/>
-            <a:ext cx="1609344" cy="1207008"/>
+          <a:xfrm rot="16200000">
+            <a:off x="1108710" y="1680210"/>
+            <a:ext cx="3086100" cy="4114800"/>
           </a:xfrm>
           <a:prstGeom prst="rect">
             <a:avLst/>
@@ -18195,25 +17980,8 @@
           </a:bodyPr>
           <a:lstStyle/>
           <a:p>
-            <a:pPr algn="l">
-              <a:lnSpc>
-                <a:spcPct val="100000"/>
-              </a:lnSpc>
-              <a:spcBef>
-                <a:spcPts val="0"/>
-              </a:spcBef>
-              <a:spcAft>
-                <a:spcPts val="0"/>
-              </a:spcAft>
-            </a:pPr>
             <a:r>
-              <a:rPr sz="869" b="1" i="0">
-                <a:solidFill>
-                  <a:srgbClr val="0075A9"/>
-                </a:solidFill>
-                <a:latin typeface="Calibri"/>
-              </a:rPr>
-              <a:t>DIGITAL · LIBRO 1</a:t>
+              <a:t>DIGITAL · BIBLIOTECA UCB</a:t>
             </a:r>
           </a:p>
         </p:txBody>
@@ -18415,25 +18183,8 @@
           </a:bodyPr>
           <a:lstStyle/>
           <a:p>
-            <a:pPr algn="l">
-              <a:lnSpc>
-                <a:spcPct val="100000"/>
-              </a:lnSpc>
-              <a:spcBef>
-                <a:spcPts val="0"/>
-              </a:spcBef>
-              <a:spcAft>
-                <a:spcPts val="0"/>
-              </a:spcAft>
-            </a:pPr>
             <a:r>
-              <a:rPr sz="869" b="1" i="0">
-                <a:solidFill>
-                  <a:srgbClr val="0075A9"/>
-                </a:solidFill>
-                <a:latin typeface="Calibri"/>
-              </a:rPr>
-              <a:t>DIGITAL · LIBRO 2</a:t>
+              <a:t>DIGITAL · BIBLIOTECA UCB</a:t>
             </a:r>
           </a:p>
         </p:txBody>
@@ -18587,7 +18338,7 @@
         <p:spPr>
           <a:xfrm>
             <a:off x="566928" y="3950208"/>
-            <a:ext cx="8010144" cy="1261872"/>
+            <a:ext cx="8010144" cy="1645920"/>
           </a:xfrm>
           <a:prstGeom prst="roundRect">
             <a:avLst>
@@ -18635,25 +18386,8 @@
           </a:bodyPr>
           <a:lstStyle/>
           <a:p>
-            <a:pPr algn="l">
-              <a:lnSpc>
-                <a:spcPct val="100000"/>
-              </a:lnSpc>
-              <a:spcBef>
-                <a:spcPts val="0"/>
-              </a:spcBef>
-              <a:spcAft>
-                <a:spcPts val="0"/>
-              </a:spcAft>
-            </a:pPr>
             <a:r>
-              <a:rPr sz="869" b="1" i="0">
-                <a:solidFill>
-                  <a:srgbClr val="0075A9"/>
-                </a:solidFill>
-                <a:latin typeface="Calibri"/>
-              </a:rPr>
-              <a:t>IMPRESO · LIBRO 3</a:t>
+              <a:t>IMPRESO · EJEMPLAR CONSULTADO</a:t>
             </a:r>
           </a:p>
         </p:txBody>
@@ -18798,113 +18532,9 @@
           </a:p>
         </p:txBody>
       </p:sp>
-      <p:sp>
-        <p:nvSpPr>
-          <p:cNvPr id="22" name="Rounded Rectangle 21"/>
-          <p:cNvSpPr/>
-          <p:nvPr/>
-        </p:nvSpPr>
-        <p:spPr>
-          <a:gradFill rotWithShape="1">
-            <a:gsLst>
-              <a:gs pos="0">
-                <a:srgbClr val="16B9B0"/>
-              </a:gs>
-              <a:gs pos="42000">
-                <a:srgbClr val="F5C66A"/>
-              </a:gs>
-              <a:gs pos="72000">
-                <a:srgbClr val="6D7BF7"/>
-              </a:gs>
-              <a:gs pos="100000">
-                <a:srgbClr val="16B9B0"/>
-              </a:gs>
-            </a:gsLst>
-            <a:lin ang="2700000" scaled="1"/>
-          </a:gradFill>
-          <a:xfrm>
-            <a:off x="7370064" y="4005072"/>
-            <a:ext cx="877824" cy="1133856"/>
-          </a:xfrm>
-          <a:prstGeom prst="roundRect">
-            <a:avLst/>
-          </a:prstGeom>
-          <a:ln w="13970">
-            <a:solidFill>
-              <a:srgbClr val="FFFFFF"/>
-            </a:solidFill>
-          </a:ln>
-        </p:spPr>
-        <p:style>
-          <a:lnRef idx="1">
-            <a:schemeClr val="accent1"/>
-          </a:lnRef>
-          <a:fillRef idx="3">
-            <a:schemeClr val="accent1"/>
-          </a:fillRef>
-          <a:effectRef idx="2">
-            <a:schemeClr val="accent1"/>
-          </a:effectRef>
-          <a:fontRef idx="minor">
-            <a:schemeClr val="lt1"/>
-          </a:fontRef>
-        </p:style>
-        <p:txBody>
-          <a:bodyPr rtlCol="0" anchor="ctr"/>
-          <a:lstStyle/>
-          <a:p>
-            <a:pPr algn="ctr"/>
-          </a:p>
-        </p:txBody>
-      </p:sp>
-      <p:sp>
-        <p:nvSpPr>
-          <p:cNvPr id="23" name="Rounded Rectangle 22"/>
-          <p:cNvSpPr/>
-          <p:nvPr/>
-        </p:nvSpPr>
-        <p:spPr>
-          <a:xfrm>
-            <a:off x="7392924" y="4027932"/>
-            <a:ext cx="832103" cy="1088136"/>
-          </a:xfrm>
-          <a:prstGeom prst="roundRect">
-            <a:avLst/>
-          </a:prstGeom>
-          <a:solidFill>
-            <a:srgbClr val="F8FAFC"/>
-          </a:solidFill>
-          <a:ln w="10160">
-            <a:solidFill>
-              <a:srgbClr val="FFFFFF"/>
-            </a:solidFill>
-          </a:ln>
-        </p:spPr>
-        <p:style>
-          <a:lnRef idx="1">
-            <a:schemeClr val="accent1"/>
-          </a:lnRef>
-          <a:fillRef idx="3">
-            <a:schemeClr val="accent1"/>
-          </a:fillRef>
-          <a:effectRef idx="2">
-            <a:schemeClr val="accent1"/>
-          </a:effectRef>
-          <a:fontRef idx="minor">
-            <a:schemeClr val="lt1"/>
-          </a:fontRef>
-        </p:style>
-        <p:txBody>
-          <a:bodyPr rtlCol="0" anchor="ctr"/>
-          <a:lstStyle/>
-          <a:p>
-            <a:pPr algn="ctr"/>
-          </a:p>
-        </p:txBody>
-      </p:sp>
       <p:pic>
         <p:nvPicPr>
-          <p:cNvPr id="24" name="Picture 23" descr="Portada de Fundamentos de bases de datos, sexta edición."/>
+          <p:cNvPr id="22" name="Foto del libro impreso · tema 04" descr="image.jpg"/>
           <p:cNvPicPr>
             <a:picLocks noChangeAspect="1"/>
           </p:cNvPicPr>
@@ -18918,8 +18548,8 @@
         </p:blipFill>
         <p:spPr>
           <a:xfrm>
-            <a:off x="7424927" y="4059936"/>
-            <a:ext cx="768096" cy="1024128"/>
+            <a:off x="7150608" y="4014215"/>
+            <a:ext cx="1097280" cy="1463040"/>
           </a:xfrm>
           <a:prstGeom prst="rect">
             <a:avLst/>

--- a/materiales/actividad-1/tema-04-modelo-datos-v4.pptx
+++ b/materiales/actividad-1/tema-04-modelo-datos-v4.pptx
@@ -11525,8 +11525,8 @@
         </p:nvSpPr>
         <p:spPr>
           <a:xfrm>
-            <a:off x="594360" y="438912"/>
-            <a:ext cx="7955279" cy="237744"/>
+            <a:off x="2743200" y="438912"/>
+            <a:ext cx="5989320" cy="256032"/>
           </a:xfrm>
           <a:prstGeom prst="rect">
             <a:avLst/>
@@ -11542,7 +11542,11 @@
           <a:p>
             <a:pPr algn="l"/>
             <a:r>
-              <a:rPr sz="1300" b="1"/>
+              <a:rPr sz="1300" b="1">
+                <a:solidFill>
+                  <a:srgbClr val="22303C"/>
+                </a:solidFill>
+              </a:rPr>
               <a:t>ACTIVIDAD 1 · TEMA 04</a:t>
             </a:r>
           </a:p>
@@ -11556,8 +11560,8 @@
         </p:nvSpPr>
         <p:spPr>
           <a:xfrm>
-            <a:off x="594360" y="749808"/>
-            <a:ext cx="7955279" cy="658368"/>
+            <a:off x="2743200" y="768096"/>
+            <a:ext cx="5989320" cy="658368"/>
           </a:xfrm>
           <a:prstGeom prst="rect">
             <a:avLst/>
@@ -11585,7 +11589,7 @@
             <a:r>
               <a:rPr sz="2900" b="1" i="0">
                 <a:solidFill>
-                  <a:srgbClr val="1D4696"/>
+                  <a:srgbClr val="22303C"/>
                 </a:solidFill>
                 <a:latin typeface="Calibri Light"/>
               </a:rPr>
@@ -11602,8 +11606,8 @@
         </p:nvSpPr>
         <p:spPr>
           <a:xfrm>
-            <a:off x="594360" y="1481328"/>
-            <a:ext cx="7955279" cy="347472"/>
+            <a:off x="2743200" y="1490472"/>
+            <a:ext cx="5989320" cy="347472"/>
           </a:xfrm>
           <a:prstGeom prst="rect">
             <a:avLst/>
@@ -11621,7 +11625,7 @@
             <a:r>
               <a:rPr sz="1800" b="1">
                 <a:solidFill>
-                  <a:srgbClr val="18488B"/>
+                  <a:srgbClr val="22303C"/>
                 </a:solidFill>
               </a:rPr>
               <a:t>SISTEMAS DE INFORMACIÓN I</a:t>
@@ -11898,8 +11902,8 @@
         </p:nvSpPr>
         <p:spPr>
           <a:xfrm>
-            <a:off x="594360" y="5650992"/>
-            <a:ext cx="7955279" cy="566928"/>
+            <a:off x="2743200" y="5623560"/>
+            <a:ext cx="5989320" cy="566928"/>
           </a:xfrm>
           <a:prstGeom prst="rect">
             <a:avLst/>
@@ -11915,9 +11919,9 @@
           <a:p>
             <a:pPr algn="ctr"/>
             <a:r>
-              <a:rPr sz="2500" b="1">
+              <a:rPr sz="2000" b="1">
                 <a:solidFill>
-                  <a:srgbClr val="18488B"/>
+                  <a:srgbClr val="22303C"/>
                 </a:solidFill>
               </a:rPr>
               <a:t>UNIVERSIDAD PRIVADA DOMINGO SAVIO</a:t>
@@ -11940,7 +11944,7 @@
           </a:stretch>
         </p:blipFill>
         <p:spPr>
-          <a:xfrm rot="16200000">
+          <a:xfrm rot="5400000">
             <a:off x="1108710" y="1680210"/>
             <a:ext cx="3086100" cy="4114800"/>
           </a:xfrm>
